--- a/M6_Final_Deployment_Report_Presentation/presentation/Presentation.pptx
+++ b/M6_Final_Deployment_Report_Presentation/presentation/Presentation.pptx
@@ -5,7 +5,7 @@
     <p:sldMasterId id="2147483648" r:id="rId1"/>
   </p:sldMasterIdLst>
   <p:notesMasterIdLst>
-    <p:notesMasterId r:id="rId12"/>
+    <p:notesMasterId r:id="rId13"/>
   </p:notesMasterIdLst>
   <p:sldIdLst>
     <p:sldId id="256" r:id="rId2"/>
@@ -13,11 +13,12 @@
     <p:sldId id="258" r:id="rId4"/>
     <p:sldId id="259" r:id="rId5"/>
     <p:sldId id="260" r:id="rId6"/>
-    <p:sldId id="261" r:id="rId7"/>
-    <p:sldId id="262" r:id="rId8"/>
-    <p:sldId id="263" r:id="rId9"/>
-    <p:sldId id="264" r:id="rId10"/>
-    <p:sldId id="265" r:id="rId11"/>
+    <p:sldId id="266" r:id="rId7"/>
+    <p:sldId id="261" r:id="rId8"/>
+    <p:sldId id="262" r:id="rId9"/>
+    <p:sldId id="263" r:id="rId10"/>
+    <p:sldId id="264" r:id="rId11"/>
+    <p:sldId id="265" r:id="rId12"/>
   </p:sldIdLst>
   <p:sldSz cx="12192000" cy="6858000"/>
   <p:notesSz cx="6858000" cy="12192000"/>
@@ -380,10 +381,10 @@
           <a:p>
             <a:r>
               <a:rPr lang="en-US" dirty="0"/>
-              <a:t>【约45秒】最后总结：我们的贡献不是单个分数，而是把完整流程做成了能运行、能解释、能演示的原型。
-它能输入场景、调用后端、输出概率、展示 EDA，也主动说明限制。
-下一步是提升严重类识别、校准概率、做阈值分析，并升级到更完整的部署环境。
-结束语：Thank you. We are ready for questions.</a:t>
+              <a:t>【约55秒】这里把鲁棒性和限制合并讲，避免页数过多。
+系统考虑了本地课堂演示可能失败的情况：模型文件、包或接口异常时，可以切换到明确标记的 demo fallback。重点是透明，不把启发式输出说成真实模型。
+限制方面，最重要的是它不是生产系统：没有认证、数据库、日志和正式部署安全措施；模型对严重伤害类别也不够强。
+因此最终定位是决策支持原型和课程展示，不是急救分诊或安全关键自动决策系统。</a:t>
             </a:r>
           </a:p>
         </p:txBody>
@@ -406,6 +407,96 @@
             <a:fld id="{F7021451-1387-4CA6-816F-3879F97B5CBC}" type="slidenum">
               <a:rPr lang="en-US"/>
               <a:t>10</a:t>
+            </a:fld>
+            <a:endParaRPr lang="en-US"/>
+          </a:p>
+        </p:txBody>
+      </p:sp>
+    </p:spTree>
+    <p:extLst>
+      <p:ext uri="{BB962C8B-B14F-4D97-AF65-F5344CB8AC3E}">
+        <p14:creationId xmlns:p14="http://schemas.microsoft.com/office/powerpoint/2010/main" val="1024086991"/>
+      </p:ext>
+    </p:extLst>
+  </p:cSld>
+  <p:clrMapOvr>
+    <a:masterClrMapping/>
+  </p:clrMapOvr>
+</p:notes>
+</file>
+
+<file path=ppt/notesSlides/notesSlide11.xml><?xml version="1.0" encoding="utf-8"?>
+<p:notes xmlns:a="http://schemas.openxmlformats.org/drawingml/2006/main" xmlns:r="http://schemas.openxmlformats.org/officeDocument/2006/relationships" xmlns:p="http://schemas.openxmlformats.org/presentationml/2006/main">
+  <p:cSld>
+    <p:spTree>
+      <p:nvGrpSpPr>
+        <p:cNvPr id="1" name=""/>
+        <p:cNvGrpSpPr/>
+        <p:nvPr/>
+      </p:nvGrpSpPr>
+      <p:grpSpPr>
+        <a:xfrm>
+          <a:off x="0" y="0"/>
+          <a:ext cx="0" cy="0"/>
+          <a:chOff x="0" y="0"/>
+          <a:chExt cx="0" cy="0"/>
+        </a:xfrm>
+      </p:grpSpPr>
+      <p:sp>
+        <p:nvSpPr>
+          <p:cNvPr id="2" name="Slide Image Placeholder 1"/>
+          <p:cNvSpPr>
+            <a:spLocks noGrp="1" noRot="1" noChangeAspect="1"/>
+          </p:cNvSpPr>
+          <p:nvPr>
+            <p:ph type="sldImg"/>
+          </p:nvPr>
+        </p:nvSpPr>
+        <p:spPr/>
+      </p:sp>
+      <p:sp>
+        <p:nvSpPr>
+          <p:cNvPr id="3" name="Notes Placeholder 2"/>
+          <p:cNvSpPr>
+            <a:spLocks noGrp="1"/>
+          </p:cNvSpPr>
+          <p:nvPr>
+            <p:ph type="body" idx="1"/>
+          </p:nvPr>
+        </p:nvSpPr>
+        <p:spPr/>
+        <p:txBody>
+          <a:bodyPr/>
+          <a:lstStyle/>
+          <a:p>
+            <a:r>
+              <a:rPr lang="en-US" dirty="0"/>
+              <a:t>【约45秒】最后总结：我们的贡献不是单个分数，而是把完整流程做成了能运行、能解释、能演示的原型。
+它能输入场景、调用后端、输出概率、展示 EDA，也主动说明限制。
+下一步是提升严重类识别、校准概率、做阈值分析，并升级到更完整的部署环境。
+结束语：Thank you. We are ready for questions.</a:t>
+            </a:r>
+          </a:p>
+        </p:txBody>
+      </p:sp>
+      <p:sp>
+        <p:nvSpPr>
+          <p:cNvPr id="4" name="Slide Number Placeholder 3"/>
+          <p:cNvSpPr>
+            <a:spLocks noGrp="1"/>
+          </p:cNvSpPr>
+          <p:nvPr>
+            <p:ph type="sldNum" sz="quarter" idx="10"/>
+          </p:nvPr>
+        </p:nvSpPr>
+        <p:spPr/>
+        <p:txBody>
+          <a:bodyPr/>
+          <a:lstStyle/>
+          <a:p>
+            <a:fld id="{F7021451-1387-4CA6-816F-3879F97B5CBC}" type="slidenum">
+              <a:rPr lang="en-US"/>
+              <a:t>11</a:t>
             </a:fld>
             <a:endParaRPr lang="en-US"/>
           </a:p>
@@ -469,9 +560,12 @@
           <a:lstStyle/>
           <a:p>
             <a:r>
-              <a:rPr lang="en-US" dirty="0"/>
-              <a:t>【约25秒】这页作为正式目录。把听众预期建立起来：问题、数据、EDA、模型、部署、限制。
-这套结构更像正式答辩，不像按作业阶段编号逐项汇报。</a:t>
+              <a:t>【约25秒】这页作为正式目录。把听众预期建立起来：问题、数据、EDA、模型架构与选择、模型表现、部署、限制。</a:t>
+            </a:r>
+          </a:p>
+          <a:p>
+            <a:r>
+              <a:t>这套结构更像正式答辩，不像按作业阶段编号逐项汇报。</a:t>
             </a:r>
           </a:p>
         </p:txBody>
@@ -796,72 +890,7 @@
           <a:chExt cx="0" cy="0"/>
         </a:xfrm>
       </p:grpSpPr>
-      <p:sp>
-        <p:nvSpPr>
-          <p:cNvPr id="2" name="Slide Image Placeholder 1"/>
-          <p:cNvSpPr>
-            <a:spLocks noGrp="1" noRot="1" noChangeAspect="1"/>
-          </p:cNvSpPr>
-          <p:nvPr>
-            <p:ph type="sldImg"/>
-          </p:nvPr>
-        </p:nvSpPr>
-        <p:spPr/>
-      </p:sp>
-      <p:sp>
-        <p:nvSpPr>
-          <p:cNvPr id="3" name="Notes Placeholder 2"/>
-          <p:cNvSpPr>
-            <a:spLocks noGrp="1"/>
-          </p:cNvSpPr>
-          <p:nvPr>
-            <p:ph type="body" idx="1"/>
-          </p:nvPr>
-        </p:nvSpPr>
-        <p:spPr/>
-        <p:txBody>
-          <a:bodyPr/>
-          <a:lstStyle/>
-          <a:p>
-            <a:r>
-              <a:rPr lang="en-US" dirty="0"/>
-              <a:t>【约60秒】这里是模型表现页，是内容上最关键的一页之一。
-左边对比显示 FT-Transformer 整体表现最好，准确率约 0.725，balanced accuracy 和 macro F1 略高于其他模型。
-但中间和右边说明了更重要的问题：严重类表现仍然弱，F1 大约 0.206，召回大约 0.232。
-所以我们不能把它包装成急救分诊系统。它更适合作为课堂原型和风险提示工具。</a:t>
-            </a:r>
-          </a:p>
-        </p:txBody>
-      </p:sp>
-      <p:sp>
-        <p:nvSpPr>
-          <p:cNvPr id="4" name="Slide Number Placeholder 3"/>
-          <p:cNvSpPr>
-            <a:spLocks noGrp="1"/>
-          </p:cNvSpPr>
-          <p:nvPr>
-            <p:ph type="sldNum" sz="quarter" idx="10"/>
-          </p:nvPr>
-        </p:nvSpPr>
-        <p:spPr/>
-        <p:txBody>
-          <a:bodyPr/>
-          <a:lstStyle/>
-          <a:p>
-            <a:fld id="{F7021451-1387-4CA6-816F-3879F97B5CBC}" type="slidenum">
-              <a:rPr lang="en-US"/>
-              <a:t>6</a:t>
-            </a:fld>
-            <a:endParaRPr lang="en-US"/>
-          </a:p>
-        </p:txBody>
-      </p:sp>
     </p:spTree>
-    <p:extLst>
-      <p:ext uri="{BB962C8B-B14F-4D97-AF65-F5344CB8AC3E}">
-        <p14:creationId xmlns:p14="http://schemas.microsoft.com/office/powerpoint/2010/main" val="1024086991"/>
-      </p:ext>
-    </p:extLst>
   </p:cSld>
   <p:clrMapOvr>
     <a:masterClrMapping/>
@@ -915,9 +944,10 @@
           <a:p>
             <a:r>
               <a:rPr lang="en-US" dirty="0"/>
-              <a:t>【约45秒】这一页讲系统流程。前端表单提交事故上下文到本地服务器，服务器提供三个接口：状态、输入 schema 和预测。
-后端先用保存的预处理元数据处理输入，再把特征送入训练好的模型，返回类别、置信度和概率分布。
-这里还可以顺带讲实时默认值：小时、星期、月份来自浏览器时间，天气可以来自外部天气服务；但用户能手动改，系统不会强制覆盖。</a:t>
+              <a:t>【约60秒】这里是模型表现页，是内容上最关键的一页之一。
+左边对比显示 FT-Transformer 整体表现最好，准确率约 0.725，balanced accuracy 和 macro F1 略高于其他模型。
+但中间和右边说明了更重要的问题：严重类表现仍然弱，F1 大约 0.206，召回大约 0.232。
+所以我们不能把它包装成急救分诊系统。它更适合作为课堂原型和风险提示工具。</a:t>
             </a:r>
           </a:p>
         </p:txBody>
@@ -1004,9 +1034,9 @@
           <a:p>
             <a:r>
               <a:rPr lang="en-US" dirty="0"/>
-              <a:t>【约50秒】这页展示真正的部署界面。讲的时候按三块区域走：左侧实时上下文，中间事故表单，右侧预测结果。
-如果现场可以演示，我会按右边的五步做：确认状态、低风险样例、预测、高风险样例、展示 JSON。
-这页的重点是说明：系统不是静态截图，而是可以运行的本地原型。</a:t>
+              <a:t>【约45秒】这一页讲系统流程。前端表单提交事故上下文到本地服务器，服务器提供三个接口：状态、输入 schema 和预测。
+后端先用保存的预处理元数据处理输入，再把特征送入训练好的模型，返回类别、置信度和概率分布。
+这里还可以顺带讲实时默认值：小时、星期、月份来自浏览器时间，天气可以来自外部天气服务；但用户能手动改，系统不会强制覆盖。</a:t>
             </a:r>
           </a:p>
         </p:txBody>
@@ -1093,10 +1123,9 @@
           <a:p>
             <a:r>
               <a:rPr lang="en-US" dirty="0"/>
-              <a:t>【约55秒】这里把鲁棒性和限制合并讲，避免页数过多。
-系统考虑了本地课堂演示可能失败的情况：模型文件、包或接口异常时，可以切换到明确标记的 demo fallback。重点是透明，不把启发式输出说成真实模型。
-限制方面，最重要的是它不是生产系统：没有认证、数据库、日志和正式部署安全措施；模型对严重伤害类别也不够强。
-因此最终定位是决策支持原型和课程展示，不是急救分诊或安全关键自动决策系统。</a:t>
+              <a:t>【约50秒】这页展示真正的部署界面。讲的时候按三块区域走：左侧实时上下文，中间事故表单，右侧预测结果。
+如果现场可以演示，我会按右边的五步做：确认状态、低风险样例、预测、高风险样例、展示 JSON。
+这页的重点是说明：系统不是静态截图，而是可以运行的本地原型。</a:t>
             </a:r>
           </a:p>
         </p:txBody>
@@ -1534,6 +1563,13 @@
             <a:prstDash val="solid"/>
           </a:ln>
         </p:spPr>
+        <p:txBody>
+          <a:bodyPr/>
+          <a:lstStyle/>
+          <a:p>
+            <a:endParaRPr/>
+          </a:p>
+        </p:txBody>
       </p:sp>
       <p:sp>
         <p:nvSpPr>
@@ -1910,12 +1946,12 @@
               <a:buNone/>
             </a:pPr>
             <a:r>
-              <a:rPr lang="en-US" sz="850" b="1" dirty="0">
+              <a:rPr sz="850" b="1">
                 <a:solidFill>
                   <a:srgbClr val="61E9DF"/>
                 </a:solidFill>
               </a:rPr>
-              <a:t>01 / 10</a:t>
+              <a:t>01 / 11</a:t>
             </a:r>
             <a:endParaRPr lang="en-US" sz="850" dirty="0"/>
           </a:p>
@@ -1930,6 +1966,842 @@
 </file>
 
 <file path=ppt/slides/slide10.xml><?xml version="1.0" encoding="utf-8"?>
+<p:sld xmlns:a="http://schemas.openxmlformats.org/drawingml/2006/main" xmlns:r="http://schemas.openxmlformats.org/officeDocument/2006/relationships" xmlns:p="http://schemas.openxmlformats.org/presentationml/2006/main">
+  <p:cSld name="Slide 9">
+    <p:bg>
+      <p:bgPr>
+        <a:solidFill>
+          <a:srgbClr val="0B1628"/>
+        </a:solidFill>
+        <a:effectLst/>
+      </p:bgPr>
+    </p:bg>
+    <p:spTree>
+      <p:nvGrpSpPr>
+        <p:cNvPr id="1" name=""/>
+        <p:cNvGrpSpPr/>
+        <p:nvPr/>
+      </p:nvGrpSpPr>
+      <p:grpSpPr>
+        <a:xfrm>
+          <a:off x="0" y="0"/>
+          <a:ext cx="0" cy="0"/>
+          <a:chOff x="0" y="0"/>
+          <a:chExt cx="0" cy="0"/>
+        </a:xfrm>
+      </p:grpSpPr>
+      <p:sp>
+        <p:nvSpPr>
+          <p:cNvPr id="2" name="Shape 0"/>
+          <p:cNvSpPr/>
+          <p:nvPr/>
+        </p:nvSpPr>
+        <p:spPr>
+          <a:xfrm>
+            <a:off x="0" y="0"/>
+            <a:ext cx="12191695" cy="6858000"/>
+          </a:xfrm>
+          <a:prstGeom prst="rect">
+            <a:avLst/>
+          </a:prstGeom>
+          <a:solidFill>
+            <a:srgbClr val="0B1628"/>
+          </a:solidFill>
+          <a:ln w="12700">
+            <a:solidFill>
+              <a:srgbClr val="0B1628">
+                <a:alpha val="0"/>
+              </a:srgbClr>
+            </a:solidFill>
+            <a:prstDash val="solid"/>
+          </a:ln>
+        </p:spPr>
+        <p:txBody>
+          <a:bodyPr/>
+          <a:lstStyle/>
+          <a:p>
+            <a:endParaRPr/>
+          </a:p>
+        </p:txBody>
+      </p:sp>
+      <p:sp>
+        <p:nvSpPr>
+          <p:cNvPr id="3" name="Shape 1"/>
+          <p:cNvSpPr/>
+          <p:nvPr/>
+        </p:nvSpPr>
+        <p:spPr>
+          <a:xfrm>
+            <a:off x="0" y="0"/>
+            <a:ext cx="118872" cy="6858000"/>
+          </a:xfrm>
+          <a:prstGeom prst="rect">
+            <a:avLst/>
+          </a:prstGeom>
+          <a:solidFill>
+            <a:srgbClr val="61E9DF"/>
+          </a:solidFill>
+          <a:ln w="12700">
+            <a:solidFill>
+              <a:srgbClr val="61E9DF">
+                <a:alpha val="0"/>
+              </a:srgbClr>
+            </a:solidFill>
+            <a:prstDash val="solid"/>
+          </a:ln>
+        </p:spPr>
+        <p:txBody>
+          <a:bodyPr/>
+          <a:lstStyle/>
+          <a:p>
+            <a:endParaRPr/>
+          </a:p>
+        </p:txBody>
+      </p:sp>
+      <p:sp>
+        <p:nvSpPr>
+          <p:cNvPr id="4" name="Text 2"/>
+          <p:cNvSpPr/>
+          <p:nvPr/>
+        </p:nvSpPr>
+        <p:spPr>
+          <a:xfrm>
+            <a:off x="685800" y="393192"/>
+            <a:ext cx="4846320" cy="201168"/>
+          </a:xfrm>
+          <a:prstGeom prst="rect">
+            <a:avLst/>
+          </a:prstGeom>
+          <a:noFill/>
+          <a:ln/>
+        </p:spPr>
+        <p:txBody>
+          <a:bodyPr wrap="square" lIns="0" tIns="0" rIns="0" bIns="0" rtlCol="0" anchor="ctr"/>
+          <a:lstStyle/>
+          <a:p>
+            <a:pPr marL="0" indent="0">
+              <a:buNone/>
+            </a:pPr>
+            <a:r>
+              <a:rPr lang="en-US" sz="840" b="1" dirty="0">
+                <a:solidFill>
+                  <a:srgbClr val="61E9DF"/>
+                </a:solidFill>
+              </a:rPr>
+              <a:t>RELIABILITY AND LIMITATIONS</a:t>
+            </a:r>
+            <a:endParaRPr lang="en-US" sz="840" dirty="0"/>
+          </a:p>
+        </p:txBody>
+      </p:sp>
+      <p:sp>
+        <p:nvSpPr>
+          <p:cNvPr id="5" name="Text 3"/>
+          <p:cNvSpPr/>
+          <p:nvPr/>
+        </p:nvSpPr>
+        <p:spPr>
+          <a:xfrm>
+            <a:off x="685800" y="704088"/>
+            <a:ext cx="9601200" cy="502920"/>
+          </a:xfrm>
+          <a:prstGeom prst="rect">
+            <a:avLst/>
+          </a:prstGeom>
+          <a:noFill/>
+          <a:ln/>
+        </p:spPr>
+        <p:txBody>
+          <a:bodyPr wrap="square" lIns="0" tIns="0" rIns="0" bIns="0" rtlCol="0" anchor="ctr">
+            <a:normAutofit/>
+          </a:bodyPr>
+          <a:lstStyle/>
+          <a:p>
+            <a:pPr marL="0" indent="0">
+              <a:buNone/>
+            </a:pPr>
+            <a:r>
+              <a:rPr lang="en-US" sz="2700" b="1" dirty="0">
+                <a:solidFill>
+                  <a:srgbClr val="EEF5FF"/>
+                </a:solidFill>
+                <a:latin typeface="Aptos Display" pitchFamily="34" charset="0"/>
+                <a:ea typeface="Aptos Display" pitchFamily="34" charset="-122"/>
+                <a:cs typeface="Aptos Display" pitchFamily="34" charset="-120"/>
+              </a:rPr>
+              <a:t>Robust demo behavior, cautious model claims</a:t>
+            </a:r>
+            <a:endParaRPr lang="en-US" sz="2700" dirty="0"/>
+          </a:p>
+        </p:txBody>
+      </p:sp>
+      <p:sp>
+        <p:nvSpPr>
+          <p:cNvPr id="6" name="Text 4"/>
+          <p:cNvSpPr/>
+          <p:nvPr/>
+        </p:nvSpPr>
+        <p:spPr>
+          <a:xfrm>
+            <a:off x="713232" y="1307592"/>
+            <a:ext cx="9875520" cy="310896"/>
+          </a:xfrm>
+          <a:prstGeom prst="rect">
+            <a:avLst/>
+          </a:prstGeom>
+          <a:noFill/>
+          <a:ln/>
+        </p:spPr>
+        <p:txBody>
+          <a:bodyPr wrap="square" lIns="0" tIns="0" rIns="0" bIns="0" rtlCol="0" anchor="ctr">
+            <a:normAutofit/>
+          </a:bodyPr>
+          <a:lstStyle/>
+          <a:p>
+            <a:pPr marL="0" indent="0">
+              <a:buNone/>
+            </a:pPr>
+            <a:r>
+              <a:rPr lang="en-US" sz="1260" dirty="0">
+                <a:solidFill>
+                  <a:srgbClr val="AAB8CF"/>
+                </a:solidFill>
+              </a:rPr>
+              <a:t>Fallback behavior is explicit, and the model is not framed as an emergency decision system.</a:t>
+            </a:r>
+            <a:endParaRPr lang="en-US" sz="1260" dirty="0"/>
+          </a:p>
+        </p:txBody>
+      </p:sp>
+      <p:sp>
+        <p:nvSpPr>
+          <p:cNvPr id="7" name="Shape 5"/>
+          <p:cNvSpPr/>
+          <p:nvPr/>
+        </p:nvSpPr>
+        <p:spPr>
+          <a:xfrm>
+            <a:off x="658368" y="1783080"/>
+            <a:ext cx="5897880" cy="3246120"/>
+          </a:xfrm>
+          <a:prstGeom prst="roundRect">
+            <a:avLst>
+              <a:gd name="adj" fmla="val 1690"/>
+            </a:avLst>
+          </a:prstGeom>
+          <a:solidFill>
+            <a:srgbClr val="FFFFFF"/>
+          </a:solidFill>
+          <a:ln w="6350">
+            <a:solidFill>
+              <a:srgbClr val="C8D1DE">
+                <a:alpha val="65000"/>
+              </a:srgbClr>
+            </a:solidFill>
+            <a:prstDash val="solid"/>
+          </a:ln>
+        </p:spPr>
+        <p:txBody>
+          <a:bodyPr/>
+          <a:lstStyle/>
+          <a:p>
+            <a:endParaRPr/>
+          </a:p>
+        </p:txBody>
+      </p:sp>
+      <p:pic>
+        <p:nvPicPr>
+          <p:cNvPr id="8" name="Image 0" descr="/mnt/data/web-EDA.png"/>
+          <p:cNvPicPr>
+            <a:picLocks noChangeAspect="1"/>
+          </p:cNvPicPr>
+          <p:nvPr/>
+        </p:nvPicPr>
+        <p:blipFill>
+          <a:blip r:embed="rId3"/>
+          <a:stretch>
+            <a:fillRect/>
+          </a:stretch>
+        </p:blipFill>
+        <p:spPr>
+          <a:xfrm>
+            <a:off x="1389930" y="1856232"/>
+            <a:ext cx="4434756" cy="3099816"/>
+          </a:xfrm>
+          <a:prstGeom prst="rect">
+            <a:avLst/>
+          </a:prstGeom>
+        </p:spPr>
+      </p:pic>
+      <p:sp>
+        <p:nvSpPr>
+          <p:cNvPr id="9" name="Shape 6"/>
+          <p:cNvSpPr/>
+          <p:nvPr/>
+        </p:nvSpPr>
+        <p:spPr>
+          <a:xfrm>
+            <a:off x="6903720" y="1783080"/>
+            <a:ext cx="4434840" cy="3246120"/>
+          </a:xfrm>
+          <a:prstGeom prst="roundRect">
+            <a:avLst>
+              <a:gd name="adj" fmla="val 2254"/>
+            </a:avLst>
+          </a:prstGeom>
+          <a:solidFill>
+            <a:srgbClr val="12233A"/>
+          </a:solidFill>
+          <a:ln w="9525">
+            <a:solidFill>
+              <a:srgbClr val="2A4467"/>
+            </a:solidFill>
+            <a:prstDash val="solid"/>
+          </a:ln>
+          <a:effectLst>
+            <a:outerShdw blurRad="12700" dist="11430" dir="2700000" algn="bl" rotWithShape="0">
+              <a:srgbClr val="000000">
+                <a:alpha val="14000"/>
+              </a:srgbClr>
+            </a:outerShdw>
+          </a:effectLst>
+        </p:spPr>
+        <p:txBody>
+          <a:bodyPr/>
+          <a:lstStyle/>
+          <a:p>
+            <a:endParaRPr/>
+          </a:p>
+        </p:txBody>
+      </p:sp>
+      <p:sp>
+        <p:nvSpPr>
+          <p:cNvPr id="10" name="Text 7"/>
+          <p:cNvSpPr/>
+          <p:nvPr/>
+        </p:nvSpPr>
+        <p:spPr>
+          <a:xfrm>
+            <a:off x="7223760" y="2121408"/>
+            <a:ext cx="1645920" cy="219456"/>
+          </a:xfrm>
+          <a:prstGeom prst="rect">
+            <a:avLst/>
+          </a:prstGeom>
+          <a:noFill/>
+          <a:ln/>
+        </p:spPr>
+        <p:txBody>
+          <a:bodyPr wrap="square" lIns="0" tIns="0" rIns="0" bIns="0" rtlCol="0" anchor="ctr"/>
+          <a:lstStyle/>
+          <a:p>
+            <a:pPr marL="0" indent="0">
+              <a:buNone/>
+            </a:pPr>
+            <a:r>
+              <a:rPr lang="en-US" sz="1400" b="1" dirty="0">
+                <a:solidFill>
+                  <a:srgbClr val="FFB15E"/>
+                </a:solidFill>
+              </a:rPr>
+              <a:t>Known limits</a:t>
+            </a:r>
+            <a:endParaRPr lang="en-US" sz="1400" dirty="0"/>
+          </a:p>
+        </p:txBody>
+      </p:sp>
+      <p:sp>
+        <p:nvSpPr>
+          <p:cNvPr id="11" name="Text 8"/>
+          <p:cNvSpPr/>
+          <p:nvPr/>
+        </p:nvSpPr>
+        <p:spPr>
+          <a:xfrm>
+            <a:off x="7242048" y="2615184"/>
+            <a:ext cx="164592" cy="164592"/>
+          </a:xfrm>
+          <a:prstGeom prst="rect">
+            <a:avLst/>
+          </a:prstGeom>
+          <a:noFill/>
+          <a:ln/>
+        </p:spPr>
+        <p:txBody>
+          <a:bodyPr wrap="square" lIns="0" tIns="0" rIns="0" bIns="0" rtlCol="0" anchor="ctr"/>
+          <a:lstStyle/>
+          <a:p>
+            <a:pPr marL="0" indent="0">
+              <a:buNone/>
+            </a:pPr>
+            <a:r>
+              <a:rPr lang="en-US" sz="1380" b="1" dirty="0">
+                <a:solidFill>
+                  <a:srgbClr val="61E9DF"/>
+                </a:solidFill>
+              </a:rPr>
+              <a:t>•</a:t>
+            </a:r>
+            <a:endParaRPr lang="en-US" sz="1380" dirty="0"/>
+          </a:p>
+        </p:txBody>
+      </p:sp>
+      <p:sp>
+        <p:nvSpPr>
+          <p:cNvPr id="12" name="Text 9"/>
+          <p:cNvSpPr/>
+          <p:nvPr/>
+        </p:nvSpPr>
+        <p:spPr>
+          <a:xfrm>
+            <a:off x="7488936" y="2596896"/>
+            <a:ext cx="3200400" cy="237744"/>
+          </a:xfrm>
+          <a:prstGeom prst="rect">
+            <a:avLst/>
+          </a:prstGeom>
+          <a:noFill/>
+          <a:ln/>
+        </p:spPr>
+        <p:txBody>
+          <a:bodyPr wrap="square" lIns="0" tIns="0" rIns="0" bIns="0" rtlCol="0" anchor="ctr">
+            <a:normAutofit fontScale="85000" lnSpcReduction="10000"/>
+          </a:bodyPr>
+          <a:lstStyle/>
+          <a:p>
+            <a:pPr marL="0" indent="0">
+              <a:buNone/>
+            </a:pPr>
+            <a:r>
+              <a:rPr lang="en-US" sz="1150" dirty="0">
+                <a:solidFill>
+                  <a:srgbClr val="D9E5F6"/>
+                </a:solidFill>
+              </a:rPr>
+              <a:t>local prototype: no auth, database, or production logging</a:t>
+            </a:r>
+            <a:endParaRPr lang="en-US" sz="1150" dirty="0"/>
+          </a:p>
+        </p:txBody>
+      </p:sp>
+      <p:sp>
+        <p:nvSpPr>
+          <p:cNvPr id="13" name="Text 10"/>
+          <p:cNvSpPr/>
+          <p:nvPr/>
+        </p:nvSpPr>
+        <p:spPr>
+          <a:xfrm>
+            <a:off x="7242048" y="3054096"/>
+            <a:ext cx="164592" cy="164592"/>
+          </a:xfrm>
+          <a:prstGeom prst="rect">
+            <a:avLst/>
+          </a:prstGeom>
+          <a:noFill/>
+          <a:ln/>
+        </p:spPr>
+        <p:txBody>
+          <a:bodyPr wrap="square" lIns="0" tIns="0" rIns="0" bIns="0" rtlCol="0" anchor="ctr"/>
+          <a:lstStyle/>
+          <a:p>
+            <a:pPr marL="0" indent="0">
+              <a:buNone/>
+            </a:pPr>
+            <a:r>
+              <a:rPr lang="en-US" sz="1380" b="1" dirty="0">
+                <a:solidFill>
+                  <a:srgbClr val="61E9DF"/>
+                </a:solidFill>
+              </a:rPr>
+              <a:t>•</a:t>
+            </a:r>
+            <a:endParaRPr lang="en-US" sz="1380" dirty="0"/>
+          </a:p>
+        </p:txBody>
+      </p:sp>
+      <p:sp>
+        <p:nvSpPr>
+          <p:cNvPr id="14" name="Text 11"/>
+          <p:cNvSpPr/>
+          <p:nvPr/>
+        </p:nvSpPr>
+        <p:spPr>
+          <a:xfrm>
+            <a:off x="7488936" y="3035808"/>
+            <a:ext cx="3200400" cy="237744"/>
+          </a:xfrm>
+          <a:prstGeom prst="rect">
+            <a:avLst/>
+          </a:prstGeom>
+          <a:noFill/>
+          <a:ln/>
+        </p:spPr>
+        <p:txBody>
+          <a:bodyPr wrap="square" lIns="0" tIns="0" rIns="0" bIns="0" rtlCol="0" anchor="ctr">
+            <a:normAutofit/>
+          </a:bodyPr>
+          <a:lstStyle/>
+          <a:p>
+            <a:pPr marL="0" indent="0">
+              <a:buNone/>
+            </a:pPr>
+            <a:r>
+              <a:rPr lang="en-US" sz="1150" dirty="0">
+                <a:solidFill>
+                  <a:srgbClr val="D9E5F6"/>
+                </a:solidFill>
+              </a:rPr>
+              <a:t>severe cases are rare and difficult to detect</a:t>
+            </a:r>
+            <a:endParaRPr lang="en-US" sz="1150" dirty="0"/>
+          </a:p>
+        </p:txBody>
+      </p:sp>
+      <p:sp>
+        <p:nvSpPr>
+          <p:cNvPr id="15" name="Text 12"/>
+          <p:cNvSpPr/>
+          <p:nvPr/>
+        </p:nvSpPr>
+        <p:spPr>
+          <a:xfrm>
+            <a:off x="7242048" y="3493008"/>
+            <a:ext cx="164592" cy="164592"/>
+          </a:xfrm>
+          <a:prstGeom prst="rect">
+            <a:avLst/>
+          </a:prstGeom>
+          <a:noFill/>
+          <a:ln/>
+        </p:spPr>
+        <p:txBody>
+          <a:bodyPr wrap="square" lIns="0" tIns="0" rIns="0" bIns="0" rtlCol="0" anchor="ctr"/>
+          <a:lstStyle/>
+          <a:p>
+            <a:pPr marL="0" indent="0">
+              <a:buNone/>
+            </a:pPr>
+            <a:r>
+              <a:rPr lang="en-US" sz="1380" b="1" dirty="0">
+                <a:solidFill>
+                  <a:srgbClr val="61E9DF"/>
+                </a:solidFill>
+              </a:rPr>
+              <a:t>•</a:t>
+            </a:r>
+            <a:endParaRPr lang="en-US" sz="1380" dirty="0"/>
+          </a:p>
+        </p:txBody>
+      </p:sp>
+      <p:sp>
+        <p:nvSpPr>
+          <p:cNvPr id="16" name="Text 13"/>
+          <p:cNvSpPr/>
+          <p:nvPr/>
+        </p:nvSpPr>
+        <p:spPr>
+          <a:xfrm>
+            <a:off x="7488936" y="3474720"/>
+            <a:ext cx="3200400" cy="237744"/>
+          </a:xfrm>
+          <a:prstGeom prst="rect">
+            <a:avLst/>
+          </a:prstGeom>
+          <a:noFill/>
+          <a:ln/>
+        </p:spPr>
+        <p:txBody>
+          <a:bodyPr wrap="square" lIns="0" tIns="0" rIns="0" bIns="0" rtlCol="0" anchor="ctr">
+            <a:normAutofit fontScale="77500" lnSpcReduction="20000"/>
+          </a:bodyPr>
+          <a:lstStyle/>
+          <a:p>
+            <a:pPr marL="0" indent="0">
+              <a:buNone/>
+            </a:pPr>
+            <a:r>
+              <a:rPr lang="en-US" sz="1150" dirty="0">
+                <a:solidFill>
+                  <a:srgbClr val="D9E5F6"/>
+                </a:solidFill>
+              </a:rPr>
+              <a:t>weather defaults depend on browser permission and API access</a:t>
+            </a:r>
+            <a:endParaRPr lang="en-US" sz="1150" dirty="0"/>
+          </a:p>
+        </p:txBody>
+      </p:sp>
+      <p:sp>
+        <p:nvSpPr>
+          <p:cNvPr id="17" name="Text 14"/>
+          <p:cNvSpPr/>
+          <p:nvPr/>
+        </p:nvSpPr>
+        <p:spPr>
+          <a:xfrm>
+            <a:off x="7242048" y="3931920"/>
+            <a:ext cx="164592" cy="164592"/>
+          </a:xfrm>
+          <a:prstGeom prst="rect">
+            <a:avLst/>
+          </a:prstGeom>
+          <a:noFill/>
+          <a:ln/>
+        </p:spPr>
+        <p:txBody>
+          <a:bodyPr wrap="square" lIns="0" tIns="0" rIns="0" bIns="0" rtlCol="0" anchor="ctr"/>
+          <a:lstStyle/>
+          <a:p>
+            <a:pPr marL="0" indent="0">
+              <a:buNone/>
+            </a:pPr>
+            <a:r>
+              <a:rPr lang="en-US" sz="1380" b="1" dirty="0">
+                <a:solidFill>
+                  <a:srgbClr val="61E9DF"/>
+                </a:solidFill>
+              </a:rPr>
+              <a:t>•</a:t>
+            </a:r>
+            <a:endParaRPr lang="en-US" sz="1380" dirty="0"/>
+          </a:p>
+        </p:txBody>
+      </p:sp>
+      <p:sp>
+        <p:nvSpPr>
+          <p:cNvPr id="18" name="Text 15"/>
+          <p:cNvSpPr/>
+          <p:nvPr/>
+        </p:nvSpPr>
+        <p:spPr>
+          <a:xfrm>
+            <a:off x="7488936" y="3913632"/>
+            <a:ext cx="3200400" cy="237744"/>
+          </a:xfrm>
+          <a:prstGeom prst="rect">
+            <a:avLst/>
+          </a:prstGeom>
+          <a:noFill/>
+          <a:ln/>
+        </p:spPr>
+        <p:txBody>
+          <a:bodyPr wrap="square" lIns="0" tIns="0" rIns="0" bIns="0" rtlCol="0" anchor="ctr">
+            <a:normAutofit/>
+          </a:bodyPr>
+          <a:lstStyle/>
+          <a:p>
+            <a:pPr marL="0" indent="0">
+              <a:buNone/>
+            </a:pPr>
+            <a:r>
+              <a:rPr lang="en-US" sz="1150" dirty="0">
+                <a:solidFill>
+                  <a:srgbClr val="D9E5F6"/>
+                </a:solidFill>
+              </a:rPr>
+              <a:t>new locations require retraining and validation</a:t>
+            </a:r>
+            <a:endParaRPr lang="en-US" sz="1150" dirty="0"/>
+          </a:p>
+        </p:txBody>
+      </p:sp>
+      <p:sp>
+        <p:nvSpPr>
+          <p:cNvPr id="19" name="Shape 16"/>
+          <p:cNvSpPr/>
+          <p:nvPr/>
+        </p:nvSpPr>
+        <p:spPr>
+          <a:xfrm>
+            <a:off x="868680" y="5330952"/>
+            <a:ext cx="10012680" cy="749808"/>
+          </a:xfrm>
+          <a:prstGeom prst="roundRect">
+            <a:avLst>
+              <a:gd name="adj" fmla="val 9756"/>
+            </a:avLst>
+          </a:prstGeom>
+          <a:solidFill>
+            <a:srgbClr val="102C43"/>
+          </a:solidFill>
+          <a:ln w="9525">
+            <a:solidFill>
+              <a:srgbClr val="2A4467"/>
+            </a:solidFill>
+            <a:prstDash val="solid"/>
+          </a:ln>
+          <a:effectLst>
+            <a:outerShdw blurRad="12700" dist="11430" dir="2700000" algn="bl" rotWithShape="0">
+              <a:srgbClr val="000000">
+                <a:alpha val="14000"/>
+              </a:srgbClr>
+            </a:outerShdw>
+          </a:effectLst>
+        </p:spPr>
+        <p:txBody>
+          <a:bodyPr/>
+          <a:lstStyle/>
+          <a:p>
+            <a:endParaRPr/>
+          </a:p>
+        </p:txBody>
+      </p:sp>
+      <p:sp>
+        <p:nvSpPr>
+          <p:cNvPr id="20" name="Text 17"/>
+          <p:cNvSpPr/>
+          <p:nvPr/>
+        </p:nvSpPr>
+        <p:spPr>
+          <a:xfrm>
+            <a:off x="1170432" y="5559552"/>
+            <a:ext cx="1508760" cy="182880"/>
+          </a:xfrm>
+          <a:prstGeom prst="rect">
+            <a:avLst/>
+          </a:prstGeom>
+          <a:noFill/>
+          <a:ln/>
+        </p:spPr>
+        <p:txBody>
+          <a:bodyPr wrap="square" lIns="0" tIns="0" rIns="0" bIns="0" rtlCol="0" anchor="ctr"/>
+          <a:lstStyle/>
+          <a:p>
+            <a:pPr marL="0" indent="0">
+              <a:buNone/>
+            </a:pPr>
+            <a:r>
+              <a:rPr lang="en-US" sz="980" b="1" dirty="0">
+                <a:solidFill>
+                  <a:srgbClr val="61E9DF"/>
+                </a:solidFill>
+              </a:rPr>
+              <a:t>Robustness rule</a:t>
+            </a:r>
+            <a:endParaRPr lang="en-US" sz="980" dirty="0"/>
+          </a:p>
+        </p:txBody>
+      </p:sp>
+      <p:sp>
+        <p:nvSpPr>
+          <p:cNvPr id="21" name="Text 18"/>
+          <p:cNvSpPr/>
+          <p:nvPr/>
+        </p:nvSpPr>
+        <p:spPr>
+          <a:xfrm>
+            <a:off x="2159000" y="5504687"/>
+            <a:ext cx="8229600" cy="421979"/>
+          </a:xfrm>
+          <a:prstGeom prst="rect">
+            <a:avLst/>
+          </a:prstGeom>
+          <a:noFill/>
+          <a:ln/>
+        </p:spPr>
+        <p:txBody>
+          <a:bodyPr wrap="square" lIns="0" tIns="0" rIns="0" bIns="0" rtlCol="0" anchor="ctr">
+            <a:normAutofit/>
+          </a:bodyPr>
+          <a:lstStyle/>
+          <a:p>
+            <a:pPr marL="0" indent="0">
+              <a:buNone/>
+            </a:pPr>
+            <a:r>
+              <a:rPr lang="en-US" sz="1230" dirty="0">
+                <a:solidFill>
+                  <a:srgbClr val="D9E5F6"/>
+                </a:solidFill>
+              </a:rPr>
+              <a:t>If model files or libraries are unavailable, the interface clearly labels demo fallback mode rather than presenting heuristic output as real model evidence.</a:t>
+            </a:r>
+            <a:endParaRPr lang="en-US" sz="1230" dirty="0"/>
+          </a:p>
+        </p:txBody>
+      </p:sp>
+      <p:sp>
+        <p:nvSpPr>
+          <p:cNvPr id="22" name="Text 19"/>
+          <p:cNvSpPr/>
+          <p:nvPr/>
+        </p:nvSpPr>
+        <p:spPr>
+          <a:xfrm>
+            <a:off x="502920" y="6547104"/>
+            <a:ext cx="6949440" cy="164592"/>
+          </a:xfrm>
+          <a:prstGeom prst="rect">
+            <a:avLst/>
+          </a:prstGeom>
+          <a:noFill/>
+          <a:ln/>
+        </p:spPr>
+        <p:txBody>
+          <a:bodyPr wrap="square" lIns="0" tIns="0" rIns="0" bIns="0" rtlCol="0" anchor="ctr"/>
+          <a:lstStyle/>
+          <a:p>
+            <a:pPr marL="0" indent="0">
+              <a:buNone/>
+            </a:pPr>
+            <a:r>
+              <a:rPr lang="en-US" sz="780" dirty="0">
+                <a:solidFill>
+                  <a:srgbClr val="778AA6"/>
+                </a:solidFill>
+              </a:rPr>
+              <a:t>INFO 442 · Traffic Accident Severity Prediction</a:t>
+            </a:r>
+            <a:endParaRPr lang="en-US" sz="780" dirty="0"/>
+          </a:p>
+        </p:txBody>
+      </p:sp>
+      <p:sp>
+        <p:nvSpPr>
+          <p:cNvPr id="23" name="Text 20"/>
+          <p:cNvSpPr/>
+          <p:nvPr/>
+        </p:nvSpPr>
+        <p:spPr>
+          <a:xfrm>
+            <a:off x="10881360" y="6473952"/>
+            <a:ext cx="777240" cy="201168"/>
+          </a:xfrm>
+          <a:prstGeom prst="rect">
+            <a:avLst/>
+          </a:prstGeom>
+          <a:noFill/>
+          <a:ln/>
+        </p:spPr>
+        <p:txBody>
+          <a:bodyPr wrap="square" lIns="0" tIns="0" rIns="0" bIns="0" rtlCol="0" anchor="ctr"/>
+          <a:lstStyle/>
+          <a:p>
+            <a:pPr marL="0" indent="0" algn="r">
+              <a:buNone/>
+            </a:pPr>
+            <a:r>
+              <a:rPr sz="850" b="1">
+                <a:solidFill>
+                  <a:srgbClr val="61E9DF"/>
+                </a:solidFill>
+              </a:rPr>
+              <a:t>10 / 11</a:t>
+            </a:r>
+            <a:endParaRPr lang="en-US" sz="850" dirty="0"/>
+          </a:p>
+        </p:txBody>
+      </p:sp>
+    </p:spTree>
+  </p:cSld>
+  <p:clrMapOvr>
+    <a:masterClrMapping/>
+  </p:clrMapOvr>
+</p:sld>
+</file>
+
+<file path=ppt/slides/slide11.xml><?xml version="1.0" encoding="utf-8"?>
 <p:sld xmlns:a="http://schemas.openxmlformats.org/drawingml/2006/main" xmlns:r="http://schemas.openxmlformats.org/officeDocument/2006/relationships" xmlns:p="http://schemas.openxmlformats.org/presentationml/2006/main">
   <p:cSld name="Slide 10">
     <p:bg>
@@ -1980,6 +2852,13 @@
             <a:prstDash val="solid"/>
           </a:ln>
         </p:spPr>
+        <p:txBody>
+          <a:bodyPr/>
+          <a:lstStyle/>
+          <a:p>
+            <a:endParaRPr/>
+          </a:p>
+        </p:txBody>
       </p:sp>
       <p:sp>
         <p:nvSpPr>
@@ -2007,6 +2886,13 @@
             <a:prstDash val="solid"/>
           </a:ln>
         </p:spPr>
+        <p:txBody>
+          <a:bodyPr/>
+          <a:lstStyle/>
+          <a:p>
+            <a:endParaRPr/>
+          </a:p>
+        </p:txBody>
       </p:sp>
       <p:sp>
         <p:nvSpPr>
@@ -2156,6 +3042,13 @@
             </a:outerShdw>
           </a:effectLst>
         </p:spPr>
+        <p:txBody>
+          <a:bodyPr/>
+          <a:lstStyle/>
+          <a:p>
+            <a:endParaRPr/>
+          </a:p>
+        </p:txBody>
       </p:sp>
       <p:sp>
         <p:nvSpPr>
@@ -2522,6 +3415,13 @@
             </a:outerShdw>
           </a:effectLst>
         </p:spPr>
+        <p:txBody>
+          <a:bodyPr/>
+          <a:lstStyle/>
+          <a:p>
+            <a:endParaRPr/>
+          </a:p>
+        </p:txBody>
       </p:sp>
       <p:sp>
         <p:nvSpPr>
@@ -2888,6 +3788,13 @@
             </a:outerShdw>
           </a:effectLst>
         </p:spPr>
+        <p:txBody>
+          <a:bodyPr/>
+          <a:lstStyle/>
+          <a:p>
+            <a:endParaRPr/>
+          </a:p>
+        </p:txBody>
       </p:sp>
       <p:sp>
         <p:nvSpPr>
@@ -3063,12 +3970,12 @@
               <a:buNone/>
             </a:pPr>
             <a:r>
-              <a:rPr lang="en-US" sz="850" b="1" dirty="0">
+              <a:rPr sz="850" b="1">
                 <a:solidFill>
                   <a:srgbClr val="61E9DF"/>
                 </a:solidFill>
               </a:rPr>
-              <a:t>10 / 10</a:t>
+              <a:t>11 / 11</a:t>
             </a:r>
             <a:endParaRPr lang="en-US" sz="850" dirty="0"/>
           </a:p>
@@ -3133,6 +4040,13 @@
             <a:prstDash val="solid"/>
           </a:ln>
         </p:spPr>
+        <p:txBody>
+          <a:bodyPr/>
+          <a:lstStyle/>
+          <a:p>
+            <a:endParaRPr/>
+          </a:p>
+        </p:txBody>
       </p:sp>
       <p:sp>
         <p:nvSpPr>
@@ -3160,6 +4074,13 @@
             <a:prstDash val="solid"/>
           </a:ln>
         </p:spPr>
+        <p:txBody>
+          <a:bodyPr/>
+          <a:lstStyle/>
+          <a:p>
+            <a:endParaRPr/>
+          </a:p>
+        </p:txBody>
       </p:sp>
       <p:sp>
         <p:nvSpPr>
@@ -3240,14 +4161,88 @@
       </p:sp>
       <p:sp>
         <p:nvSpPr>
-          <p:cNvPr id="6" name="Text 4"/>
-          <p:cNvSpPr/>
-          <p:nvPr/>
-        </p:nvSpPr>
-        <p:spPr>
-          <a:xfrm>
-            <a:off x="713232" y="1307592"/>
-            <a:ext cx="9875520" cy="310896"/>
+          <p:cNvPr id="7" name="Text 5"/>
+          <p:cNvSpPr/>
+          <p:nvPr/>
+        </p:nvSpPr>
+        <p:spPr>
+          <a:xfrm>
+            <a:off x="868680" y="1618488"/>
+            <a:ext cx="475488" cy="237744"/>
+          </a:xfrm>
+          <a:prstGeom prst="rect">
+            <a:avLst/>
+          </a:prstGeom>
+          <a:noFill/>
+          <a:ln/>
+        </p:spPr>
+        <p:txBody>
+          <a:bodyPr wrap="square" lIns="0" tIns="0" rIns="0" bIns="0" rtlCol="0" anchor="ctr"/>
+          <a:lstStyle/>
+          <a:p>
+            <a:pPr marL="0" indent="0">
+              <a:buNone/>
+            </a:pPr>
+            <a:r>
+              <a:rPr sz="1850" b="1">
+                <a:solidFill>
+                  <a:srgbClr val="61E9DF"/>
+                </a:solidFill>
+              </a:rPr>
+              <a:t>01</a:t>
+            </a:r>
+            <a:endParaRPr lang="en-US" sz="1250" dirty="0"/>
+          </a:p>
+        </p:txBody>
+      </p:sp>
+      <p:sp>
+        <p:nvSpPr>
+          <p:cNvPr id="8" name="Text 6"/>
+          <p:cNvSpPr/>
+          <p:nvPr/>
+        </p:nvSpPr>
+        <p:spPr>
+          <a:xfrm>
+            <a:off x="1527048" y="1600200"/>
+            <a:ext cx="3657600" cy="292608"/>
+          </a:xfrm>
+          <a:prstGeom prst="rect">
+            <a:avLst/>
+          </a:prstGeom>
+          <a:noFill/>
+          <a:ln/>
+        </p:spPr>
+        <p:txBody>
+          <a:bodyPr wrap="square" lIns="0" tIns="0" rIns="0" bIns="0" rtlCol="0" anchor="ctr">
+            <a:normAutofit lnSpcReduction="10000"/>
+          </a:bodyPr>
+          <a:lstStyle/>
+          <a:p>
+            <a:pPr marL="0" indent="0">
+              <a:buNone/>
+            </a:pPr>
+            <a:r>
+              <a:rPr sz="1850" b="1">
+                <a:solidFill>
+                  <a:srgbClr val="EEF5FF"/>
+                </a:solidFill>
+              </a:rPr>
+              <a:t>Problem &amp; goal</a:t>
+            </a:r>
+            <a:endParaRPr lang="en-US" sz="1650" dirty="0"/>
+          </a:p>
+        </p:txBody>
+      </p:sp>
+      <p:sp>
+        <p:nvSpPr>
+          <p:cNvPr id="9" name="Text 7"/>
+          <p:cNvSpPr/>
+          <p:nvPr/>
+        </p:nvSpPr>
+        <p:spPr>
+          <a:xfrm>
+            <a:off x="1527048" y="1965960"/>
+            <a:ext cx="3749039" cy="274320"/>
           </a:xfrm>
           <a:prstGeom prst="rect">
             <a:avLst/>
@@ -3265,26 +4260,26 @@
               <a:buNone/>
             </a:pPr>
             <a:r>
-              <a:rPr lang="en-US" sz="1260" dirty="0">
+              <a:rPr sz="1230" b="0">
                 <a:solidFill>
                   <a:srgbClr val="AAB8CF"/>
                 </a:solidFill>
               </a:rPr>
-              <a:t>A 7-minute path from project motivation to deployment and model limitations.</a:t>
-            </a:r>
-            <a:endParaRPr lang="en-US" sz="1260" dirty="0"/>
-          </a:p>
-        </p:txBody>
-      </p:sp>
-      <p:sp>
-        <p:nvSpPr>
-          <p:cNvPr id="7" name="Text 5"/>
-          <p:cNvSpPr/>
-          <p:nvPr/>
-        </p:nvSpPr>
-        <p:spPr>
-          <a:xfrm>
-            <a:off x="868680" y="1874520"/>
+              <a:t>What decision the model is trying to support.</a:t>
+            </a:r>
+            <a:endParaRPr lang="en-US" sz="1060" dirty="0"/>
+          </a:p>
+        </p:txBody>
+      </p:sp>
+      <p:sp>
+        <p:nvSpPr>
+          <p:cNvPr id="10" name="Text 8"/>
+          <p:cNvSpPr/>
+          <p:nvPr/>
+        </p:nvSpPr>
+        <p:spPr>
+          <a:xfrm>
+            <a:off x="868680" y="2468880"/>
             <a:ext cx="475488" cy="237744"/>
           </a:xfrm>
           <a:prstGeom prst="rect">
@@ -3301,12 +4296,12 @@
               <a:buNone/>
             </a:pPr>
             <a:r>
-              <a:rPr lang="en-US" sz="1250" b="1" dirty="0">
+              <a:rPr sz="1850" b="1">
                 <a:solidFill>
                   <a:srgbClr val="61E9DF"/>
                 </a:solidFill>
               </a:rPr>
-              <a:t>01</a:t>
+              <a:t>02</a:t>
             </a:r>
             <a:endParaRPr lang="en-US" sz="1250" dirty="0"/>
           </a:p>
@@ -3314,14 +4309,14 @@
       </p:sp>
       <p:sp>
         <p:nvSpPr>
-          <p:cNvPr id="8" name="Text 6"/>
-          <p:cNvSpPr/>
-          <p:nvPr/>
-        </p:nvSpPr>
-        <p:spPr>
-          <a:xfrm>
-            <a:off x="1527048" y="1856232"/>
-            <a:ext cx="3291840" cy="246888"/>
+          <p:cNvPr id="11" name="Text 9"/>
+          <p:cNvSpPr/>
+          <p:nvPr/>
+        </p:nvSpPr>
+        <p:spPr>
+          <a:xfrm>
+            <a:off x="1527048" y="2450592"/>
+            <a:ext cx="3657600" cy="292608"/>
           </a:xfrm>
           <a:prstGeom prst="rect">
             <a:avLst/>
@@ -3339,12 +4334,12 @@
               <a:buNone/>
             </a:pPr>
             <a:r>
-              <a:rPr lang="en-US" sz="1650" b="1" dirty="0">
+              <a:rPr sz="1850" b="1">
                 <a:solidFill>
                   <a:srgbClr val="EEF5FF"/>
                 </a:solidFill>
               </a:rPr>
-              <a:t>Problem &amp; goal</a:t>
+              <a:t>Data and preprocessing</a:t>
             </a:r>
             <a:endParaRPr lang="en-US" sz="1650" dirty="0"/>
           </a:p>
@@ -3352,14 +4347,14 @@
       </p:sp>
       <p:sp>
         <p:nvSpPr>
-          <p:cNvPr id="9" name="Text 7"/>
-          <p:cNvSpPr/>
-          <p:nvPr/>
-        </p:nvSpPr>
-        <p:spPr>
-          <a:xfrm>
-            <a:off x="1527048" y="2221992"/>
-            <a:ext cx="3840480" cy="201168"/>
+          <p:cNvPr id="12" name="Text 10"/>
+          <p:cNvSpPr/>
+          <p:nvPr/>
+        </p:nvSpPr>
+        <p:spPr>
+          <a:xfrm>
+            <a:off x="1527048" y="2816352"/>
+            <a:ext cx="3749039" cy="274320"/>
           </a:xfrm>
           <a:prstGeom prst="rect">
             <a:avLst/>
@@ -3377,12 +4372,12 @@
               <a:buNone/>
             </a:pPr>
             <a:r>
-              <a:rPr lang="en-US" sz="1060" dirty="0">
+              <a:rPr sz="1230" b="0">
                 <a:solidFill>
                   <a:srgbClr val="AAB8CF"/>
                 </a:solidFill>
               </a:rPr>
-              <a:t>What decision the model is trying to support.</a:t>
+              <a:t>How inputs are cleaned, encoded, and kept consistent.</a:t>
             </a:r>
             <a:endParaRPr lang="en-US" sz="1060" dirty="0"/>
           </a:p>
@@ -3390,13 +4385,13 @@
       </p:sp>
       <p:sp>
         <p:nvSpPr>
-          <p:cNvPr id="10" name="Text 8"/>
-          <p:cNvSpPr/>
-          <p:nvPr/>
-        </p:nvSpPr>
-        <p:spPr>
-          <a:xfrm>
-            <a:off x="5989320" y="1874520"/>
+          <p:cNvPr id="13" name="Text 11"/>
+          <p:cNvSpPr/>
+          <p:nvPr/>
+        </p:nvSpPr>
+        <p:spPr>
+          <a:xfrm>
+            <a:off x="868680" y="3319272"/>
             <a:ext cx="475488" cy="237744"/>
           </a:xfrm>
           <a:prstGeom prst="rect">
@@ -3413,12 +4408,12 @@
               <a:buNone/>
             </a:pPr>
             <a:r>
-              <a:rPr lang="en-US" sz="1250" b="1" dirty="0">
+              <a:rPr sz="1850" b="1">
                 <a:solidFill>
                   <a:srgbClr val="61E9DF"/>
                 </a:solidFill>
               </a:rPr>
-              <a:t>02</a:t>
+              <a:t>03</a:t>
             </a:r>
             <a:endParaRPr lang="en-US" sz="1250" dirty="0"/>
           </a:p>
@@ -3426,14 +4421,14 @@
       </p:sp>
       <p:sp>
         <p:nvSpPr>
-          <p:cNvPr id="11" name="Text 9"/>
-          <p:cNvSpPr/>
-          <p:nvPr/>
-        </p:nvSpPr>
-        <p:spPr>
-          <a:xfrm>
-            <a:off x="6647688" y="1856232"/>
-            <a:ext cx="3291840" cy="246888"/>
+          <p:cNvPr id="14" name="Text 12"/>
+          <p:cNvSpPr/>
+          <p:nvPr/>
+        </p:nvSpPr>
+        <p:spPr>
+          <a:xfrm>
+            <a:off x="1527048" y="3300984"/>
+            <a:ext cx="3657600" cy="292608"/>
           </a:xfrm>
           <a:prstGeom prst="rect">
             <a:avLst/>
@@ -3451,12 +4446,12 @@
               <a:buNone/>
             </a:pPr>
             <a:r>
-              <a:rPr lang="en-US" sz="1650" b="1" dirty="0">
+              <a:rPr sz="1850" b="1">
                 <a:solidFill>
                   <a:srgbClr val="EEF5FF"/>
                 </a:solidFill>
               </a:rPr>
-              <a:t>Data and preprocessing</a:t>
+              <a:t>EDA findings</a:t>
             </a:r>
             <a:endParaRPr lang="en-US" sz="1650" dirty="0"/>
           </a:p>
@@ -3464,14 +4459,14 @@
       </p:sp>
       <p:sp>
         <p:nvSpPr>
-          <p:cNvPr id="12" name="Text 10"/>
-          <p:cNvSpPr/>
-          <p:nvPr/>
-        </p:nvSpPr>
-        <p:spPr>
-          <a:xfrm>
-            <a:off x="6647688" y="2221992"/>
-            <a:ext cx="3840480" cy="201168"/>
+          <p:cNvPr id="15" name="Text 13"/>
+          <p:cNvSpPr/>
+          <p:nvPr/>
+        </p:nvSpPr>
+        <p:spPr>
+          <a:xfrm>
+            <a:off x="1527048" y="3666744"/>
+            <a:ext cx="3749039" cy="274320"/>
           </a:xfrm>
           <a:prstGeom prst="rect">
             <a:avLst/>
@@ -3489,12 +4484,12 @@
               <a:buNone/>
             </a:pPr>
             <a:r>
-              <a:rPr lang="en-US" sz="1060" dirty="0">
+              <a:rPr sz="1230" b="0">
                 <a:solidFill>
                   <a:srgbClr val="AAB8CF"/>
                 </a:solidFill>
               </a:rPr>
-              <a:t>How inputs are cleaned, encoded, and kept consistent.</a:t>
+              <a:t>Why the task is imbalanced and context-dependent.</a:t>
             </a:r>
             <a:endParaRPr lang="en-US" sz="1060" dirty="0"/>
           </a:p>
@@ -3502,13 +4497,13 @@
       </p:sp>
       <p:sp>
         <p:nvSpPr>
-          <p:cNvPr id="13" name="Text 11"/>
-          <p:cNvSpPr/>
-          <p:nvPr/>
-        </p:nvSpPr>
-        <p:spPr>
-          <a:xfrm>
-            <a:off x="868680" y="3017520"/>
+          <p:cNvPr id="16" name="Text 14"/>
+          <p:cNvSpPr/>
+          <p:nvPr/>
+        </p:nvSpPr>
+        <p:spPr>
+          <a:xfrm>
+            <a:off x="868680" y="4169663"/>
             <a:ext cx="475488" cy="237744"/>
           </a:xfrm>
           <a:prstGeom prst="rect">
@@ -3525,12 +4520,12 @@
               <a:buNone/>
             </a:pPr>
             <a:r>
-              <a:rPr lang="en-US" sz="1250" b="1" dirty="0">
+              <a:rPr sz="1850" b="1">
                 <a:solidFill>
                   <a:srgbClr val="61E9DF"/>
                 </a:solidFill>
               </a:rPr>
-              <a:t>03</a:t>
+              <a:t>04</a:t>
             </a:r>
             <a:endParaRPr lang="en-US" sz="1250" dirty="0"/>
           </a:p>
@@ -3538,14 +4533,14 @@
       </p:sp>
       <p:sp>
         <p:nvSpPr>
-          <p:cNvPr id="14" name="Text 12"/>
-          <p:cNvSpPr/>
-          <p:nvPr/>
-        </p:nvSpPr>
-        <p:spPr>
-          <a:xfrm>
-            <a:off x="1527048" y="2999232"/>
-            <a:ext cx="3291840" cy="246888"/>
+          <p:cNvPr id="17" name="Text 15"/>
+          <p:cNvSpPr/>
+          <p:nvPr/>
+        </p:nvSpPr>
+        <p:spPr>
+          <a:xfrm>
+            <a:off x="1527048" y="4151376"/>
+            <a:ext cx="3657600" cy="292608"/>
           </a:xfrm>
           <a:prstGeom prst="rect">
             <a:avLst/>
@@ -3563,12 +4558,12 @@
               <a:buNone/>
             </a:pPr>
             <a:r>
-              <a:rPr lang="en-US" sz="1650" b="1" dirty="0">
+              <a:rPr sz="1850" b="1">
                 <a:solidFill>
                   <a:srgbClr val="EEF5FF"/>
                 </a:solidFill>
               </a:rPr>
-              <a:t>EDA findings</a:t>
+              <a:t>Model architecture &amp; selection</a:t>
             </a:r>
             <a:endParaRPr lang="en-US" sz="1650" dirty="0"/>
           </a:p>
@@ -3576,14 +4571,14 @@
       </p:sp>
       <p:sp>
         <p:nvSpPr>
-          <p:cNvPr id="15" name="Text 13"/>
-          <p:cNvSpPr/>
-          <p:nvPr/>
-        </p:nvSpPr>
-        <p:spPr>
-          <a:xfrm>
-            <a:off x="1527048" y="3364992"/>
-            <a:ext cx="3840480" cy="201168"/>
+          <p:cNvPr id="18" name="Text 16"/>
+          <p:cNvSpPr/>
+          <p:nvPr/>
+        </p:nvSpPr>
+        <p:spPr>
+          <a:xfrm>
+            <a:off x="1527048" y="4517136"/>
+            <a:ext cx="3749039" cy="274320"/>
           </a:xfrm>
           <a:prstGeom prst="rect">
             <a:avLst/>
@@ -3601,12 +4596,12 @@
               <a:buNone/>
             </a:pPr>
             <a:r>
-              <a:rPr lang="en-US" sz="1060" dirty="0">
+              <a:rPr sz="1230" b="0">
                 <a:solidFill>
                   <a:srgbClr val="AAB8CF"/>
                 </a:solidFill>
               </a:rPr>
-              <a:t>Why the task is imbalanced and context-dependent.</a:t>
+              <a:t>Why FT-Transformer was selected for deployment.</a:t>
             </a:r>
             <a:endParaRPr lang="en-US" sz="1060" dirty="0"/>
           </a:p>
@@ -3614,13 +4609,13 @@
       </p:sp>
       <p:sp>
         <p:nvSpPr>
-          <p:cNvPr id="16" name="Text 14"/>
-          <p:cNvSpPr/>
-          <p:nvPr/>
-        </p:nvSpPr>
-        <p:spPr>
-          <a:xfrm>
-            <a:off x="5989320" y="3017520"/>
+          <p:cNvPr id="19" name="Text 17"/>
+          <p:cNvSpPr/>
+          <p:nvPr/>
+        </p:nvSpPr>
+        <p:spPr>
+          <a:xfrm>
+            <a:off x="5989320" y="1618488"/>
             <a:ext cx="475488" cy="237744"/>
           </a:xfrm>
           <a:prstGeom prst="rect">
@@ -3637,12 +4632,12 @@
               <a:buNone/>
             </a:pPr>
             <a:r>
-              <a:rPr lang="en-US" sz="1250" b="1" dirty="0">
+              <a:rPr sz="1850" b="1">
                 <a:solidFill>
                   <a:srgbClr val="61E9DF"/>
                 </a:solidFill>
               </a:rPr>
-              <a:t>04</a:t>
+              <a:t>05</a:t>
             </a:r>
             <a:endParaRPr lang="en-US" sz="1250" dirty="0"/>
           </a:p>
@@ -3650,14 +4645,14 @@
       </p:sp>
       <p:sp>
         <p:nvSpPr>
-          <p:cNvPr id="17" name="Text 15"/>
-          <p:cNvSpPr/>
-          <p:nvPr/>
-        </p:nvSpPr>
-        <p:spPr>
-          <a:xfrm>
-            <a:off x="6647688" y="2999232"/>
-            <a:ext cx="3291840" cy="246888"/>
+          <p:cNvPr id="20" name="Text 18"/>
+          <p:cNvSpPr/>
+          <p:nvPr/>
+        </p:nvSpPr>
+        <p:spPr>
+          <a:xfrm>
+            <a:off x="6647688" y="1600200"/>
+            <a:ext cx="3657600" cy="292608"/>
           </a:xfrm>
           <a:prstGeom prst="rect">
             <a:avLst/>
@@ -3675,7 +4670,7 @@
               <a:buNone/>
             </a:pPr>
             <a:r>
-              <a:rPr lang="en-US" sz="1650" b="1" dirty="0">
+              <a:rPr sz="1850" b="1">
                 <a:solidFill>
                   <a:srgbClr val="EEF5FF"/>
                 </a:solidFill>
@@ -3688,14 +4683,14 @@
       </p:sp>
       <p:sp>
         <p:nvSpPr>
-          <p:cNvPr id="18" name="Text 16"/>
-          <p:cNvSpPr/>
-          <p:nvPr/>
-        </p:nvSpPr>
-        <p:spPr>
-          <a:xfrm>
-            <a:off x="6647688" y="3364992"/>
-            <a:ext cx="3840480" cy="201168"/>
+          <p:cNvPr id="21" name="Text 19"/>
+          <p:cNvSpPr/>
+          <p:nvPr/>
+        </p:nvSpPr>
+        <p:spPr>
+          <a:xfrm>
+            <a:off x="6647688" y="1965960"/>
+            <a:ext cx="3749039" cy="274320"/>
           </a:xfrm>
           <a:prstGeom prst="rect">
             <a:avLst/>
@@ -3713,12 +4708,12 @@
               <a:buNone/>
             </a:pPr>
             <a:r>
-              <a:rPr lang="en-US" sz="1060" dirty="0">
+              <a:rPr sz="1230" b="0">
                 <a:solidFill>
                   <a:srgbClr val="AAB8CF"/>
                 </a:solidFill>
               </a:rPr>
-              <a:t>What the trained models can and cannot detect.</a:t>
+              <a:t>What the trained model can and cannot detect.</a:t>
             </a:r>
             <a:endParaRPr lang="en-US" sz="1060" dirty="0"/>
           </a:p>
@@ -3726,13 +4721,13 @@
       </p:sp>
       <p:sp>
         <p:nvSpPr>
-          <p:cNvPr id="19" name="Text 17"/>
-          <p:cNvSpPr/>
-          <p:nvPr/>
-        </p:nvSpPr>
-        <p:spPr>
-          <a:xfrm>
-            <a:off x="868680" y="4160520"/>
+          <p:cNvPr id="22" name="Text 20"/>
+          <p:cNvSpPr/>
+          <p:nvPr/>
+        </p:nvSpPr>
+        <p:spPr>
+          <a:xfrm>
+            <a:off x="5989320" y="2679192"/>
             <a:ext cx="475488" cy="237744"/>
           </a:xfrm>
           <a:prstGeom prst="rect">
@@ -3749,12 +4744,12 @@
               <a:buNone/>
             </a:pPr>
             <a:r>
-              <a:rPr lang="en-US" sz="1250" b="1" dirty="0">
+              <a:rPr sz="1850" b="1">
                 <a:solidFill>
                   <a:srgbClr val="61E9DF"/>
                 </a:solidFill>
               </a:rPr>
-              <a:t>05</a:t>
+              <a:t>06</a:t>
             </a:r>
             <a:endParaRPr lang="en-US" sz="1250" dirty="0"/>
           </a:p>
@@ -3762,14 +4757,14 @@
       </p:sp>
       <p:sp>
         <p:nvSpPr>
-          <p:cNvPr id="20" name="Text 18"/>
-          <p:cNvSpPr/>
-          <p:nvPr/>
-        </p:nvSpPr>
-        <p:spPr>
-          <a:xfrm>
-            <a:off x="1527048" y="4142232"/>
-            <a:ext cx="3291840" cy="246888"/>
+          <p:cNvPr id="23" name="Text 21"/>
+          <p:cNvSpPr/>
+          <p:nvPr/>
+        </p:nvSpPr>
+        <p:spPr>
+          <a:xfrm>
+            <a:off x="6647688" y="2660904"/>
+            <a:ext cx="3657600" cy="292608"/>
           </a:xfrm>
           <a:prstGeom prst="rect">
             <a:avLst/>
@@ -3787,7 +4782,7 @@
               <a:buNone/>
             </a:pPr>
             <a:r>
-              <a:rPr lang="en-US" sz="1650" b="1" dirty="0">
+              <a:rPr sz="1850" b="1">
                 <a:solidFill>
                   <a:srgbClr val="EEF5FF"/>
                 </a:solidFill>
@@ -3800,14 +4795,14 @@
       </p:sp>
       <p:sp>
         <p:nvSpPr>
-          <p:cNvPr id="21" name="Text 19"/>
-          <p:cNvSpPr/>
-          <p:nvPr/>
-        </p:nvSpPr>
-        <p:spPr>
-          <a:xfrm>
-            <a:off x="1527048" y="4507992"/>
-            <a:ext cx="3840480" cy="201168"/>
+          <p:cNvPr id="24" name="Text 22"/>
+          <p:cNvSpPr/>
+          <p:nvPr/>
+        </p:nvSpPr>
+        <p:spPr>
+          <a:xfrm>
+            <a:off x="6647688" y="3026664"/>
+            <a:ext cx="3749039" cy="274320"/>
           </a:xfrm>
           <a:prstGeom prst="rect">
             <a:avLst/>
@@ -3825,124 +4820,12 @@
               <a:buNone/>
             </a:pPr>
             <a:r>
-              <a:rPr lang="en-US" sz="1060" dirty="0">
+              <a:rPr sz="1230" b="0">
                 <a:solidFill>
                   <a:srgbClr val="AAB8CF"/>
                 </a:solidFill>
               </a:rPr>
               <a:t>How the web app, API, and saved metadata work together.</a:t>
-            </a:r>
-            <a:endParaRPr lang="en-US" sz="1060" dirty="0"/>
-          </a:p>
-        </p:txBody>
-      </p:sp>
-      <p:sp>
-        <p:nvSpPr>
-          <p:cNvPr id="22" name="Text 20"/>
-          <p:cNvSpPr/>
-          <p:nvPr/>
-        </p:nvSpPr>
-        <p:spPr>
-          <a:xfrm>
-            <a:off x="5989320" y="4160520"/>
-            <a:ext cx="475488" cy="237744"/>
-          </a:xfrm>
-          <a:prstGeom prst="rect">
-            <a:avLst/>
-          </a:prstGeom>
-          <a:noFill/>
-          <a:ln/>
-        </p:spPr>
-        <p:txBody>
-          <a:bodyPr wrap="square" lIns="0" tIns="0" rIns="0" bIns="0" rtlCol="0" anchor="ctr"/>
-          <a:lstStyle/>
-          <a:p>
-            <a:pPr marL="0" indent="0">
-              <a:buNone/>
-            </a:pPr>
-            <a:r>
-              <a:rPr lang="en-US" sz="1250" b="1" dirty="0">
-                <a:solidFill>
-                  <a:srgbClr val="61E9DF"/>
-                </a:solidFill>
-              </a:rPr>
-              <a:t>06</a:t>
-            </a:r>
-            <a:endParaRPr lang="en-US" sz="1250" dirty="0"/>
-          </a:p>
-        </p:txBody>
-      </p:sp>
-      <p:sp>
-        <p:nvSpPr>
-          <p:cNvPr id="23" name="Text 21"/>
-          <p:cNvSpPr/>
-          <p:nvPr/>
-        </p:nvSpPr>
-        <p:spPr>
-          <a:xfrm>
-            <a:off x="6647688" y="4142232"/>
-            <a:ext cx="3291840" cy="246888"/>
-          </a:xfrm>
-          <a:prstGeom prst="rect">
-            <a:avLst/>
-          </a:prstGeom>
-          <a:noFill/>
-          <a:ln/>
-        </p:spPr>
-        <p:txBody>
-          <a:bodyPr wrap="square" lIns="0" tIns="0" rIns="0" bIns="0" rtlCol="0" anchor="ctr">
-            <a:normAutofit lnSpcReduction="10000"/>
-          </a:bodyPr>
-          <a:lstStyle/>
-          <a:p>
-            <a:pPr marL="0" indent="0">
-              <a:buNone/>
-            </a:pPr>
-            <a:r>
-              <a:rPr lang="en-US" sz="1650" b="1" dirty="0">
-                <a:solidFill>
-                  <a:srgbClr val="EEF5FF"/>
-                </a:solidFill>
-              </a:rPr>
-              <a:t>Limitations and next steps</a:t>
-            </a:r>
-            <a:endParaRPr lang="en-US" sz="1650" dirty="0"/>
-          </a:p>
-        </p:txBody>
-      </p:sp>
-      <p:sp>
-        <p:nvSpPr>
-          <p:cNvPr id="24" name="Text 22"/>
-          <p:cNvSpPr/>
-          <p:nvPr/>
-        </p:nvSpPr>
-        <p:spPr>
-          <a:xfrm>
-            <a:off x="6647688" y="4507992"/>
-            <a:ext cx="3840480" cy="201168"/>
-          </a:xfrm>
-          <a:prstGeom prst="rect">
-            <a:avLst/>
-          </a:prstGeom>
-          <a:noFill/>
-          <a:ln/>
-        </p:spPr>
-        <p:txBody>
-          <a:bodyPr wrap="square" lIns="0" tIns="0" rIns="0" bIns="0" rtlCol="0" anchor="ctr">
-            <a:normAutofit/>
-          </a:bodyPr>
-          <a:lstStyle/>
-          <a:p>
-            <a:pPr marL="0" indent="0">
-              <a:buNone/>
-            </a:pPr>
-            <a:r>
-              <a:rPr lang="en-US" sz="1060" dirty="0">
-                <a:solidFill>
-                  <a:srgbClr val="AAB8CF"/>
-                </a:solidFill>
-              </a:rPr>
-              <a:t>Where the prototype should not be overclaimed.</a:t>
             </a:r>
             <a:endParaRPr lang="en-US" sz="1060" dirty="0"/>
           </a:p>
@@ -4009,14 +4892,113 @@
               <a:buNone/>
             </a:pPr>
             <a:r>
-              <a:rPr lang="en-US" sz="850" b="1" dirty="0">
+              <a:rPr sz="850" b="1">
                 <a:solidFill>
                   <a:srgbClr val="61E9DF"/>
                 </a:solidFill>
               </a:rPr>
-              <a:t>02 / 10</a:t>
+              <a:t>02 / 11</a:t>
             </a:r>
             <a:endParaRPr lang="en-US" sz="850" dirty="0"/>
+          </a:p>
+        </p:txBody>
+      </p:sp>
+      <p:sp>
+        <p:nvSpPr>
+          <p:cNvPr id="30" name="TextBox 29"/>
+          <p:cNvSpPr txBox="1"/>
+          <p:nvPr/>
+        </p:nvSpPr>
+        <p:spPr>
+          <a:xfrm>
+            <a:off x="5989320" y="3739896"/>
+            <a:ext cx="475488" cy="237744"/>
+          </a:xfrm>
+          <a:prstGeom prst="rect">
+            <a:avLst/>
+          </a:prstGeom>
+          <a:noFill/>
+        </p:spPr>
+        <p:txBody>
+          <a:bodyPr wrap="none" lIns="0" tIns="0" rIns="0" bIns="0">
+            <a:spAutoFit/>
+          </a:bodyPr>
+          <a:lstStyle/>
+          <a:p>
+            <a:r>
+              <a:rPr sz="1850" b="1">
+                <a:solidFill>
+                  <a:srgbClr val="61E9DF"/>
+                </a:solidFill>
+              </a:rPr>
+              <a:t>07</a:t>
+            </a:r>
+          </a:p>
+        </p:txBody>
+      </p:sp>
+      <p:sp>
+        <p:nvSpPr>
+          <p:cNvPr id="31" name="TextBox 30"/>
+          <p:cNvSpPr txBox="1"/>
+          <p:nvPr/>
+        </p:nvSpPr>
+        <p:spPr>
+          <a:xfrm>
+            <a:off x="6647688" y="3721608"/>
+            <a:ext cx="3657600" cy="292608"/>
+          </a:xfrm>
+          <a:prstGeom prst="rect">
+            <a:avLst/>
+          </a:prstGeom>
+          <a:noFill/>
+        </p:spPr>
+        <p:txBody>
+          <a:bodyPr wrap="none" lIns="0" tIns="0" rIns="0" bIns="0">
+            <a:spAutoFit/>
+          </a:bodyPr>
+          <a:lstStyle/>
+          <a:p>
+            <a:r>
+              <a:rPr sz="1850" b="1">
+                <a:solidFill>
+                  <a:srgbClr val="EEF5FF"/>
+                </a:solidFill>
+              </a:rPr>
+              <a:t>Limitations and next steps</a:t>
+            </a:r>
+          </a:p>
+        </p:txBody>
+      </p:sp>
+      <p:sp>
+        <p:nvSpPr>
+          <p:cNvPr id="32" name="TextBox 31"/>
+          <p:cNvSpPr txBox="1"/>
+          <p:nvPr/>
+        </p:nvSpPr>
+        <p:spPr>
+          <a:xfrm>
+            <a:off x="6647688" y="4087368"/>
+            <a:ext cx="3749039" cy="274320"/>
+          </a:xfrm>
+          <a:prstGeom prst="rect">
+            <a:avLst/>
+          </a:prstGeom>
+          <a:noFill/>
+        </p:spPr>
+        <p:txBody>
+          <a:bodyPr wrap="none" lIns="0" tIns="0" rIns="0" bIns="0">
+            <a:spAutoFit/>
+          </a:bodyPr>
+          <a:lstStyle/>
+          <a:p>
+            <a:r>
+              <a:rPr sz="1230" b="0">
+                <a:solidFill>
+                  <a:srgbClr val="AAB8CF"/>
+                </a:solidFill>
+              </a:rPr>
+              <a:t>Where the prototype should not be overclaimed.</a:t>
+            </a:r>
           </a:p>
         </p:txBody>
       </p:sp>
@@ -4079,6 +5061,13 @@
             <a:prstDash val="solid"/>
           </a:ln>
         </p:spPr>
+        <p:txBody>
+          <a:bodyPr/>
+          <a:lstStyle/>
+          <a:p>
+            <a:endParaRPr/>
+          </a:p>
+        </p:txBody>
       </p:sp>
       <p:sp>
         <p:nvSpPr>
@@ -4106,6 +5095,13 @@
             <a:prstDash val="solid"/>
           </a:ln>
         </p:spPr>
+        <p:txBody>
+          <a:bodyPr/>
+          <a:lstStyle/>
+          <a:p>
+            <a:endParaRPr/>
+          </a:p>
+        </p:txBody>
       </p:sp>
       <p:sp>
         <p:nvSpPr>
@@ -4255,6 +5251,13 @@
             </a:outerShdw>
           </a:effectLst>
         </p:spPr>
+        <p:txBody>
+          <a:bodyPr/>
+          <a:lstStyle/>
+          <a:p>
+            <a:endParaRPr/>
+          </a:p>
+        </p:txBody>
       </p:sp>
       <p:sp>
         <p:nvSpPr>
@@ -4695,6 +5698,13 @@
             </a:outerShdw>
           </a:effectLst>
         </p:spPr>
+        <p:txBody>
+          <a:bodyPr/>
+          <a:lstStyle/>
+          <a:p>
+            <a:endParaRPr/>
+          </a:p>
+        </p:txBody>
       </p:sp>
       <p:sp>
         <p:nvSpPr>
@@ -4841,6 +5851,13 @@
             </a:outerShdw>
           </a:effectLst>
         </p:spPr>
+        <p:txBody>
+          <a:bodyPr/>
+          <a:lstStyle/>
+          <a:p>
+            <a:endParaRPr/>
+          </a:p>
+        </p:txBody>
       </p:sp>
       <p:sp>
         <p:nvSpPr>
@@ -5167,12 +6184,12 @@
               <a:buNone/>
             </a:pPr>
             <a:r>
-              <a:rPr lang="en-US" sz="850" b="1" dirty="0">
+              <a:rPr sz="850" b="1">
                 <a:solidFill>
                   <a:srgbClr val="61E9DF"/>
                 </a:solidFill>
               </a:rPr>
-              <a:t>03 / 10</a:t>
+              <a:t>03 / 11</a:t>
             </a:r>
             <a:endParaRPr lang="en-US" sz="850" dirty="0"/>
           </a:p>
@@ -5237,6 +6254,13 @@
             <a:prstDash val="solid"/>
           </a:ln>
         </p:spPr>
+        <p:txBody>
+          <a:bodyPr/>
+          <a:lstStyle/>
+          <a:p>
+            <a:endParaRPr/>
+          </a:p>
+        </p:txBody>
       </p:sp>
       <p:sp>
         <p:nvSpPr>
@@ -5264,6 +6288,13 @@
             <a:prstDash val="solid"/>
           </a:ln>
         </p:spPr>
+        <p:txBody>
+          <a:bodyPr/>
+          <a:lstStyle/>
+          <a:p>
+            <a:endParaRPr/>
+          </a:p>
+        </p:txBody>
       </p:sp>
       <p:sp>
         <p:nvSpPr>
@@ -5640,6 +6671,13 @@
             <a:tailEnd type="triangle"/>
           </a:ln>
         </p:spPr>
+        <p:txBody>
+          <a:bodyPr/>
+          <a:lstStyle/>
+          <a:p>
+            <a:endParaRPr/>
+          </a:p>
+        </p:txBody>
       </p:sp>
       <p:sp>
         <p:nvSpPr>
@@ -5664,6 +6702,13 @@
             <a:tailEnd type="triangle"/>
           </a:ln>
         </p:spPr>
+        <p:txBody>
+          <a:bodyPr/>
+          <a:lstStyle/>
+          <a:p>
+            <a:endParaRPr/>
+          </a:p>
+        </p:txBody>
       </p:sp>
       <p:sp>
         <p:nvSpPr>
@@ -5688,6 +6733,13 @@
             <a:tailEnd type="triangle"/>
           </a:ln>
         </p:spPr>
+        <p:txBody>
+          <a:bodyPr/>
+          <a:lstStyle/>
+          <a:p>
+            <a:endParaRPr/>
+          </a:p>
+        </p:txBody>
       </p:sp>
       <p:sp>
         <p:nvSpPr>
@@ -5712,6 +6764,13 @@
             <a:tailEnd type="triangle"/>
           </a:ln>
         </p:spPr>
+        <p:txBody>
+          <a:bodyPr/>
+          <a:lstStyle/>
+          <a:p>
+            <a:endParaRPr/>
+          </a:p>
+        </p:txBody>
       </p:sp>
       <p:sp>
         <p:nvSpPr>
@@ -5736,6 +6795,13 @@
             <a:tailEnd type="triangle"/>
           </a:ln>
         </p:spPr>
+        <p:txBody>
+          <a:bodyPr/>
+          <a:lstStyle/>
+          <a:p>
+            <a:endParaRPr/>
+          </a:p>
+        </p:txBody>
       </p:sp>
       <p:sp>
         <p:nvSpPr>
@@ -5770,6 +6836,13 @@
             </a:outerShdw>
           </a:effectLst>
         </p:spPr>
+        <p:txBody>
+          <a:bodyPr/>
+          <a:lstStyle/>
+          <a:p>
+            <a:endParaRPr/>
+          </a:p>
+        </p:txBody>
       </p:sp>
       <p:sp>
         <p:nvSpPr>
@@ -5842,6 +6915,13 @@
             </a:outerShdw>
           </a:effectLst>
         </p:spPr>
+        <p:txBody>
+          <a:bodyPr/>
+          <a:lstStyle/>
+          <a:p>
+            <a:endParaRPr/>
+          </a:p>
+        </p:txBody>
       </p:sp>
       <p:sp>
         <p:nvSpPr>
@@ -5914,6 +6994,13 @@
             </a:outerShdw>
           </a:effectLst>
         </p:spPr>
+        <p:txBody>
+          <a:bodyPr/>
+          <a:lstStyle/>
+          <a:p>
+            <a:endParaRPr/>
+          </a:p>
+        </p:txBody>
       </p:sp>
       <p:sp>
         <p:nvSpPr>
@@ -5986,6 +7073,13 @@
             </a:outerShdw>
           </a:effectLst>
         </p:spPr>
+        <p:txBody>
+          <a:bodyPr/>
+          <a:lstStyle/>
+          <a:p>
+            <a:endParaRPr/>
+          </a:p>
+        </p:txBody>
       </p:sp>
       <p:sp>
         <p:nvSpPr>
@@ -6058,6 +7152,13 @@
             </a:outerShdw>
           </a:effectLst>
         </p:spPr>
+        <p:txBody>
+          <a:bodyPr/>
+          <a:lstStyle/>
+          <a:p>
+            <a:endParaRPr/>
+          </a:p>
+        </p:txBody>
       </p:sp>
       <p:sp>
         <p:nvSpPr>
@@ -6130,6 +7231,13 @@
             </a:outerShdw>
           </a:effectLst>
         </p:spPr>
+        <p:txBody>
+          <a:bodyPr/>
+          <a:lstStyle/>
+          <a:p>
+            <a:endParaRPr/>
+          </a:p>
+        </p:txBody>
       </p:sp>
       <p:sp>
         <p:nvSpPr>
@@ -6202,6 +7310,13 @@
             </a:outerShdw>
           </a:effectLst>
         </p:spPr>
+        <p:txBody>
+          <a:bodyPr/>
+          <a:lstStyle/>
+          <a:p>
+            <a:endParaRPr/>
+          </a:p>
+        </p:txBody>
       </p:sp>
       <p:sp>
         <p:nvSpPr>
@@ -6338,12 +7453,12 @@
               <a:buNone/>
             </a:pPr>
             <a:r>
-              <a:rPr lang="en-US" sz="850" b="1" dirty="0">
+              <a:rPr sz="850" b="1">
                 <a:solidFill>
                   <a:srgbClr val="61E9DF"/>
                 </a:solidFill>
               </a:rPr>
-              <a:t>04 / 10</a:t>
+              <a:t>04 / 11</a:t>
             </a:r>
             <a:endParaRPr lang="en-US" sz="850" dirty="0"/>
           </a:p>
@@ -6408,6 +7523,13 @@
             <a:prstDash val="solid"/>
           </a:ln>
         </p:spPr>
+        <p:txBody>
+          <a:bodyPr/>
+          <a:lstStyle/>
+          <a:p>
+            <a:endParaRPr/>
+          </a:p>
+        </p:txBody>
       </p:sp>
       <p:sp>
         <p:nvSpPr>
@@ -6435,6 +7557,13 @@
             <a:prstDash val="solid"/>
           </a:ln>
         </p:spPr>
+        <p:txBody>
+          <a:bodyPr/>
+          <a:lstStyle/>
+          <a:p>
+            <a:endParaRPr/>
+          </a:p>
+        </p:txBody>
       </p:sp>
       <p:sp>
         <p:nvSpPr>
@@ -6579,6 +7708,13 @@
             <a:prstDash val="solid"/>
           </a:ln>
         </p:spPr>
+        <p:txBody>
+          <a:bodyPr/>
+          <a:lstStyle/>
+          <a:p>
+            <a:endParaRPr/>
+          </a:p>
+        </p:txBody>
       </p:sp>
       <p:pic>
         <p:nvPicPr>
@@ -6670,6 +7806,13 @@
             <a:prstDash val="solid"/>
           </a:ln>
         </p:spPr>
+        <p:txBody>
+          <a:bodyPr/>
+          <a:lstStyle/>
+          <a:p>
+            <a:endParaRPr/>
+          </a:p>
+        </p:txBody>
       </p:sp>
       <p:pic>
         <p:nvPicPr>
@@ -6761,6 +7904,13 @@
             <a:prstDash val="solid"/>
           </a:ln>
         </p:spPr>
+        <p:txBody>
+          <a:bodyPr/>
+          <a:lstStyle/>
+          <a:p>
+            <a:endParaRPr/>
+          </a:p>
+        </p:txBody>
       </p:sp>
       <p:pic>
         <p:nvPicPr>
@@ -6857,6 +8007,13 @@
             </a:outerShdw>
           </a:effectLst>
         </p:spPr>
+        <p:txBody>
+          <a:bodyPr/>
+          <a:lstStyle/>
+          <a:p>
+            <a:endParaRPr/>
+          </a:p>
+        </p:txBody>
       </p:sp>
       <p:sp>
         <p:nvSpPr>
@@ -6993,12 +8150,12 @@
               <a:buNone/>
             </a:pPr>
             <a:r>
-              <a:rPr lang="en-US" sz="850" b="1" dirty="0">
+              <a:rPr sz="850" b="1">
                 <a:solidFill>
                   <a:srgbClr val="61E9DF"/>
                 </a:solidFill>
               </a:rPr>
-              <a:t>05 / 10</a:t>
+              <a:t>05 / 11</a:t>
             </a:r>
             <a:endParaRPr lang="en-US" sz="850" dirty="0"/>
           </a:p>
@@ -7013,6 +8170,1092 @@
 </file>
 
 <file path=ppt/slides/slide6.xml><?xml version="1.0" encoding="utf-8"?>
+<p:sld xmlns:a="http://schemas.openxmlformats.org/drawingml/2006/main" xmlns:r="http://schemas.openxmlformats.org/officeDocument/2006/relationships" xmlns:p="http://schemas.openxmlformats.org/presentationml/2006/main">
+  <p:cSld>
+    <p:spTree>
+      <p:nvGrpSpPr>
+        <p:cNvPr id="1" name=""/>
+        <p:cNvGrpSpPr/>
+        <p:nvPr/>
+      </p:nvGrpSpPr>
+      <p:grpSpPr>
+        <a:xfrm>
+          <a:off x="0" y="0"/>
+          <a:ext cx="0" cy="0"/>
+          <a:chOff x="0" y="0"/>
+          <a:chExt cx="0" cy="0"/>
+        </a:xfrm>
+      </p:grpSpPr>
+      <p:sp>
+        <p:nvSpPr>
+          <p:cNvPr id="2" name="Rectangle 1"/>
+          <p:cNvSpPr/>
+          <p:nvPr/>
+        </p:nvSpPr>
+        <p:spPr>
+          <a:xfrm>
+            <a:off x="0" y="0"/>
+            <a:ext cx="12192000" cy="6858000"/>
+          </a:xfrm>
+          <a:prstGeom prst="rect">
+            <a:avLst/>
+          </a:prstGeom>
+          <a:solidFill>
+            <a:srgbClr val="0B1628"/>
+          </a:solidFill>
+          <a:ln>
+            <a:noFill/>
+          </a:ln>
+        </p:spPr>
+        <p:style>
+          <a:lnRef idx="1">
+            <a:schemeClr val="accent1"/>
+          </a:lnRef>
+          <a:fillRef idx="3">
+            <a:schemeClr val="accent1"/>
+          </a:fillRef>
+          <a:effectRef idx="2">
+            <a:schemeClr val="accent1"/>
+          </a:effectRef>
+          <a:fontRef idx="minor">
+            <a:schemeClr val="lt1"/>
+          </a:fontRef>
+        </p:style>
+        <p:txBody>
+          <a:bodyPr rtlCol="0" anchor="ctr"/>
+          <a:lstStyle/>
+          <a:p>
+            <a:pPr algn="ctr"/>
+            <a:endParaRPr/>
+          </a:p>
+        </p:txBody>
+      </p:sp>
+      <p:sp>
+        <p:nvSpPr>
+          <p:cNvPr id="3" name="Rectangle 2"/>
+          <p:cNvSpPr/>
+          <p:nvPr/>
+        </p:nvSpPr>
+        <p:spPr>
+          <a:xfrm>
+            <a:off x="0" y="0"/>
+            <a:ext cx="118872" cy="6858000"/>
+          </a:xfrm>
+          <a:prstGeom prst="rect">
+            <a:avLst/>
+          </a:prstGeom>
+          <a:solidFill>
+            <a:srgbClr val="61E9DF"/>
+          </a:solidFill>
+          <a:ln>
+            <a:noFill/>
+          </a:ln>
+        </p:spPr>
+        <p:style>
+          <a:lnRef idx="1">
+            <a:schemeClr val="accent1"/>
+          </a:lnRef>
+          <a:fillRef idx="3">
+            <a:schemeClr val="accent1"/>
+          </a:fillRef>
+          <a:effectRef idx="2">
+            <a:schemeClr val="accent1"/>
+          </a:effectRef>
+          <a:fontRef idx="minor">
+            <a:schemeClr val="lt1"/>
+          </a:fontRef>
+        </p:style>
+        <p:txBody>
+          <a:bodyPr rtlCol="0" anchor="ctr"/>
+          <a:lstStyle/>
+          <a:p>
+            <a:pPr algn="ctr"/>
+            <a:endParaRPr/>
+          </a:p>
+        </p:txBody>
+      </p:sp>
+      <p:sp>
+        <p:nvSpPr>
+          <p:cNvPr id="4" name="TextBox 3"/>
+          <p:cNvSpPr txBox="1"/>
+          <p:nvPr/>
+        </p:nvSpPr>
+        <p:spPr>
+          <a:xfrm>
+            <a:off x="502920" y="6547104"/>
+            <a:ext cx="6949440" cy="164592"/>
+          </a:xfrm>
+          <a:prstGeom prst="rect">
+            <a:avLst/>
+          </a:prstGeom>
+          <a:noFill/>
+        </p:spPr>
+        <p:txBody>
+          <a:bodyPr wrap="none" lIns="0" tIns="0" rIns="0" bIns="0">
+            <a:spAutoFit/>
+          </a:bodyPr>
+          <a:lstStyle/>
+          <a:p>
+            <a:r>
+              <a:rPr sz="780" b="0">
+                <a:solidFill>
+                  <a:srgbClr val="778AA6"/>
+                </a:solidFill>
+              </a:rPr>
+              <a:t>INFO 442 · Traffic Accident Severity Prediction</a:t>
+            </a:r>
+          </a:p>
+        </p:txBody>
+      </p:sp>
+      <p:sp>
+        <p:nvSpPr>
+          <p:cNvPr id="5" name="TextBox 4"/>
+          <p:cNvSpPr txBox="1"/>
+          <p:nvPr/>
+        </p:nvSpPr>
+        <p:spPr>
+          <a:xfrm>
+            <a:off x="10881360" y="6473952"/>
+            <a:ext cx="777240" cy="201168"/>
+          </a:xfrm>
+          <a:prstGeom prst="rect">
+            <a:avLst/>
+          </a:prstGeom>
+          <a:noFill/>
+        </p:spPr>
+        <p:txBody>
+          <a:bodyPr wrap="none" lIns="0" tIns="0" rIns="0" bIns="0">
+            <a:spAutoFit/>
+          </a:bodyPr>
+          <a:lstStyle/>
+          <a:p>
+            <a:pPr algn="r"/>
+            <a:r>
+              <a:rPr sz="850" b="1">
+                <a:solidFill>
+                  <a:srgbClr val="61E9DF"/>
+                </a:solidFill>
+              </a:rPr>
+              <a:t>06 / 11</a:t>
+            </a:r>
+          </a:p>
+        </p:txBody>
+      </p:sp>
+      <p:sp>
+        <p:nvSpPr>
+          <p:cNvPr id="6" name="TextBox 5"/>
+          <p:cNvSpPr txBox="1"/>
+          <p:nvPr/>
+        </p:nvSpPr>
+        <p:spPr>
+          <a:xfrm>
+            <a:off x="685800" y="393192"/>
+            <a:ext cx="5303520" cy="228600"/>
+          </a:xfrm>
+          <a:prstGeom prst="rect">
+            <a:avLst/>
+          </a:prstGeom>
+          <a:noFill/>
+        </p:spPr>
+        <p:txBody>
+          <a:bodyPr wrap="none" lIns="0" tIns="0" rIns="0" bIns="0">
+            <a:spAutoFit/>
+          </a:bodyPr>
+          <a:lstStyle/>
+          <a:p>
+            <a:r>
+              <a:rPr sz="840" b="1">
+                <a:solidFill>
+                  <a:srgbClr val="61E9DF"/>
+                </a:solidFill>
+              </a:rPr>
+              <a:t>MODEL ARCHITECTURE &amp; SELECTION</a:t>
+            </a:r>
+          </a:p>
+        </p:txBody>
+      </p:sp>
+      <p:sp>
+        <p:nvSpPr>
+          <p:cNvPr id="7" name="TextBox 6"/>
+          <p:cNvSpPr txBox="1"/>
+          <p:nvPr/>
+        </p:nvSpPr>
+        <p:spPr>
+          <a:xfrm>
+            <a:off x="685800" y="704088"/>
+            <a:ext cx="9601200" cy="530352"/>
+          </a:xfrm>
+          <a:prstGeom prst="rect">
+            <a:avLst/>
+          </a:prstGeom>
+          <a:noFill/>
+        </p:spPr>
+        <p:txBody>
+          <a:bodyPr wrap="none" lIns="0" tIns="0" rIns="0" bIns="0">
+            <a:spAutoFit/>
+          </a:bodyPr>
+          <a:lstStyle/>
+          <a:p>
+            <a:r>
+              <a:rPr sz="2700" b="1">
+                <a:solidFill>
+                  <a:srgbClr val="EEF5FF"/>
+                </a:solidFill>
+                <a:latin typeface="Aptos Display"/>
+              </a:rPr>
+              <a:t>Compare candidates before reading the score page</a:t>
+            </a:r>
+          </a:p>
+        </p:txBody>
+      </p:sp>
+      <p:sp>
+        <p:nvSpPr>
+          <p:cNvPr id="8" name="TextBox 7"/>
+          <p:cNvSpPr txBox="1"/>
+          <p:nvPr/>
+        </p:nvSpPr>
+        <p:spPr>
+          <a:xfrm>
+            <a:off x="713232" y="1307592"/>
+            <a:ext cx="9875520" cy="310896"/>
+          </a:xfrm>
+          <a:prstGeom prst="rect">
+            <a:avLst/>
+          </a:prstGeom>
+          <a:noFill/>
+        </p:spPr>
+        <p:txBody>
+          <a:bodyPr wrap="none" lIns="0" tIns="0" rIns="0" bIns="0">
+            <a:spAutoFit/>
+          </a:bodyPr>
+          <a:lstStyle/>
+          <a:p>
+            <a:r>
+              <a:rPr sz="1260" b="0">
+                <a:solidFill>
+                  <a:srgbClr val="AAB8CF"/>
+                </a:solidFill>
+              </a:rPr>
+              <a:t>The final deployment uses the validation Macro F1 winner, not the highest-accuracy shortcut.</a:t>
+            </a:r>
+          </a:p>
+        </p:txBody>
+      </p:sp>
+      <p:cxnSp>
+        <p:nvCxnSpPr>
+          <p:cNvPr id="9" name="Connector 8"/>
+          <p:cNvCxnSpPr/>
+          <p:nvPr/>
+        </p:nvCxnSpPr>
+        <p:spPr>
+          <a:xfrm>
+            <a:off x="2450592" y="2788920"/>
+            <a:ext cx="475488" cy="0"/>
+          </a:xfrm>
+          <a:prstGeom prst="line">
+            <a:avLst/>
+          </a:prstGeom>
+          <a:ln w="17780">
+            <a:solidFill>
+              <a:srgbClr val="61E9DF"/>
+            </a:solidFill>
+          </a:ln>
+        </p:spPr>
+        <p:style>
+          <a:lnRef idx="2">
+            <a:schemeClr val="accent1"/>
+          </a:lnRef>
+          <a:fillRef idx="0">
+            <a:schemeClr val="accent1"/>
+          </a:fillRef>
+          <a:effectRef idx="1">
+            <a:schemeClr val="accent1"/>
+          </a:effectRef>
+          <a:fontRef idx="minor">
+            <a:schemeClr val="tx1"/>
+          </a:fontRef>
+        </p:style>
+      </p:cxnSp>
+      <p:cxnSp>
+        <p:nvCxnSpPr>
+          <p:cNvPr id="10" name="Connector 9"/>
+          <p:cNvCxnSpPr/>
+          <p:nvPr/>
+        </p:nvCxnSpPr>
+        <p:spPr>
+          <a:xfrm>
+            <a:off x="5285232" y="2788920"/>
+            <a:ext cx="429768" cy="0"/>
+          </a:xfrm>
+          <a:prstGeom prst="line">
+            <a:avLst/>
+          </a:prstGeom>
+          <a:ln w="17780">
+            <a:solidFill>
+              <a:srgbClr val="61E9DF"/>
+            </a:solidFill>
+          </a:ln>
+        </p:spPr>
+        <p:style>
+          <a:lnRef idx="2">
+            <a:schemeClr val="accent1"/>
+          </a:lnRef>
+          <a:fillRef idx="0">
+            <a:schemeClr val="accent1"/>
+          </a:fillRef>
+          <a:effectRef idx="1">
+            <a:schemeClr val="accent1"/>
+          </a:effectRef>
+          <a:fontRef idx="minor">
+            <a:schemeClr val="tx1"/>
+          </a:fontRef>
+        </p:style>
+      </p:cxnSp>
+      <p:cxnSp>
+        <p:nvCxnSpPr>
+          <p:cNvPr id="11" name="Connector 10"/>
+          <p:cNvCxnSpPr/>
+          <p:nvPr/>
+        </p:nvCxnSpPr>
+        <p:spPr>
+          <a:xfrm>
+            <a:off x="8348472" y="2788920"/>
+            <a:ext cx="384048" cy="0"/>
+          </a:xfrm>
+          <a:prstGeom prst="line">
+            <a:avLst/>
+          </a:prstGeom>
+          <a:ln w="17780">
+            <a:solidFill>
+              <a:srgbClr val="61E9DF"/>
+            </a:solidFill>
+          </a:ln>
+        </p:spPr>
+        <p:style>
+          <a:lnRef idx="2">
+            <a:schemeClr val="accent1"/>
+          </a:lnRef>
+          <a:fillRef idx="0">
+            <a:schemeClr val="accent1"/>
+          </a:fillRef>
+          <a:effectRef idx="1">
+            <a:schemeClr val="accent1"/>
+          </a:effectRef>
+          <a:fontRef idx="minor">
+            <a:schemeClr val="tx1"/>
+          </a:fontRef>
+        </p:style>
+      </p:cxnSp>
+      <p:sp>
+        <p:nvSpPr>
+          <p:cNvPr id="12" name="Rounded Rectangle 11"/>
+          <p:cNvSpPr/>
+          <p:nvPr/>
+        </p:nvSpPr>
+        <p:spPr>
+          <a:xfrm>
+            <a:off x="685800" y="1874519"/>
+            <a:ext cx="1783080" cy="1874519"/>
+          </a:xfrm>
+          <a:prstGeom prst="roundRect">
+            <a:avLst/>
+          </a:prstGeom>
+          <a:solidFill>
+            <a:srgbClr val="13243B"/>
+          </a:solidFill>
+          <a:ln>
+            <a:noFill/>
+          </a:ln>
+        </p:spPr>
+        <p:style>
+          <a:lnRef idx="1">
+            <a:schemeClr val="accent1"/>
+          </a:lnRef>
+          <a:fillRef idx="3">
+            <a:schemeClr val="accent1"/>
+          </a:fillRef>
+          <a:effectRef idx="2">
+            <a:schemeClr val="accent1"/>
+          </a:effectRef>
+          <a:fontRef idx="minor">
+            <a:schemeClr val="lt1"/>
+          </a:fontRef>
+        </p:style>
+        <p:txBody>
+          <a:bodyPr rtlCol="0" anchor="ctr"/>
+          <a:lstStyle/>
+          <a:p>
+            <a:pPr algn="ctr"/>
+            <a:endParaRPr/>
+          </a:p>
+        </p:txBody>
+      </p:sp>
+      <p:sp>
+        <p:nvSpPr>
+          <p:cNvPr id="13" name="TextBox 12"/>
+          <p:cNvSpPr txBox="1"/>
+          <p:nvPr/>
+        </p:nvSpPr>
+        <p:spPr>
+          <a:xfrm>
+            <a:off x="868680" y="2130552"/>
+            <a:ext cx="1417319" cy="292608"/>
+          </a:xfrm>
+          <a:prstGeom prst="rect">
+            <a:avLst/>
+          </a:prstGeom>
+          <a:noFill/>
+        </p:spPr>
+        <p:txBody>
+          <a:bodyPr wrap="none" lIns="0" tIns="0" rIns="0" bIns="0">
+            <a:spAutoFit/>
+          </a:bodyPr>
+          <a:lstStyle/>
+          <a:p>
+            <a:r>
+              <a:rPr sz="1320" b="1">
+                <a:solidFill>
+                  <a:srgbClr val="EEF5FF"/>
+                </a:solidFill>
+              </a:rPr>
+              <a:t>Crash features</a:t>
+            </a:r>
+          </a:p>
+        </p:txBody>
+      </p:sp>
+      <p:sp>
+        <p:nvSpPr>
+          <p:cNvPr id="14" name="TextBox 13"/>
+          <p:cNvSpPr txBox="1"/>
+          <p:nvPr/>
+        </p:nvSpPr>
+        <p:spPr>
+          <a:xfrm>
+            <a:off x="787400" y="2624327"/>
+            <a:ext cx="1635760" cy="489365"/>
+          </a:xfrm>
+          <a:prstGeom prst="rect">
+            <a:avLst/>
+          </a:prstGeom>
+          <a:noFill/>
+        </p:spPr>
+        <p:txBody>
+          <a:bodyPr wrap="square" lIns="0" tIns="0" rIns="0" bIns="0">
+            <a:spAutoFit/>
+          </a:bodyPr>
+          <a:lstStyle/>
+          <a:p>
+            <a:r>
+              <a:rPr sz="1060" b="0" dirty="0">
+                <a:solidFill>
+                  <a:srgbClr val="AAB8CF"/>
+                </a:solidFill>
+              </a:rPr>
+              <a:t>categorical context
++ numeric time / unit features</a:t>
+            </a:r>
+          </a:p>
+        </p:txBody>
+      </p:sp>
+      <p:sp>
+        <p:nvSpPr>
+          <p:cNvPr id="15" name="Rounded Rectangle 14"/>
+          <p:cNvSpPr/>
+          <p:nvPr/>
+        </p:nvSpPr>
+        <p:spPr>
+          <a:xfrm>
+            <a:off x="2926080" y="1874519"/>
+            <a:ext cx="2331720" cy="1874519"/>
+          </a:xfrm>
+          <a:prstGeom prst="roundRect">
+            <a:avLst/>
+          </a:prstGeom>
+          <a:solidFill>
+            <a:srgbClr val="13243B"/>
+          </a:solidFill>
+          <a:ln>
+            <a:noFill/>
+          </a:ln>
+        </p:spPr>
+        <p:style>
+          <a:lnRef idx="1">
+            <a:schemeClr val="accent1"/>
+          </a:lnRef>
+          <a:fillRef idx="3">
+            <a:schemeClr val="accent1"/>
+          </a:fillRef>
+          <a:effectRef idx="2">
+            <a:schemeClr val="accent1"/>
+          </a:effectRef>
+          <a:fontRef idx="minor">
+            <a:schemeClr val="lt1"/>
+          </a:fontRef>
+        </p:style>
+        <p:txBody>
+          <a:bodyPr rtlCol="0" anchor="ctr"/>
+          <a:lstStyle/>
+          <a:p>
+            <a:pPr algn="ctr"/>
+            <a:endParaRPr/>
+          </a:p>
+        </p:txBody>
+      </p:sp>
+      <p:sp>
+        <p:nvSpPr>
+          <p:cNvPr id="16" name="TextBox 15"/>
+          <p:cNvSpPr txBox="1"/>
+          <p:nvPr/>
+        </p:nvSpPr>
+        <p:spPr>
+          <a:xfrm>
+            <a:off x="3108960" y="2130552"/>
+            <a:ext cx="1965960" cy="292608"/>
+          </a:xfrm>
+          <a:prstGeom prst="rect">
+            <a:avLst/>
+          </a:prstGeom>
+          <a:noFill/>
+        </p:spPr>
+        <p:txBody>
+          <a:bodyPr wrap="none" lIns="0" tIns="0" rIns="0" bIns="0">
+            <a:spAutoFit/>
+          </a:bodyPr>
+          <a:lstStyle/>
+          <a:p>
+            <a:r>
+              <a:rPr sz="1320" b="1">
+                <a:solidFill>
+                  <a:srgbClr val="EEF5FF"/>
+                </a:solidFill>
+              </a:rPr>
+              <a:t>Model-specific encoding</a:t>
+            </a:r>
+          </a:p>
+        </p:txBody>
+      </p:sp>
+      <p:sp>
+        <p:nvSpPr>
+          <p:cNvPr id="17" name="TextBox 16"/>
+          <p:cNvSpPr txBox="1"/>
+          <p:nvPr/>
+        </p:nvSpPr>
+        <p:spPr>
+          <a:xfrm>
+            <a:off x="3108960" y="2624327"/>
+            <a:ext cx="1965960" cy="960119"/>
+          </a:xfrm>
+          <a:prstGeom prst="rect">
+            <a:avLst/>
+          </a:prstGeom>
+          <a:noFill/>
+        </p:spPr>
+        <p:txBody>
+          <a:bodyPr wrap="none" lIns="0" tIns="0" rIns="0" bIns="0">
+            <a:spAutoFit/>
+          </a:bodyPr>
+          <a:lstStyle/>
+          <a:p>
+            <a:r>
+              <a:rPr sz="1060" b="0">
+                <a:solidFill>
+                  <a:srgbClr val="AAB8CF"/>
+                </a:solidFill>
+              </a:rPr>
+              <a:t>CatBoost: raw categories
+XGBoost: one-hot features
+FT: embeddings + numeric tokens</a:t>
+            </a:r>
+          </a:p>
+        </p:txBody>
+      </p:sp>
+      <p:sp>
+        <p:nvSpPr>
+          <p:cNvPr id="18" name="Rounded Rectangle 17"/>
+          <p:cNvSpPr/>
+          <p:nvPr/>
+        </p:nvSpPr>
+        <p:spPr>
+          <a:xfrm>
+            <a:off x="5715000" y="1874519"/>
+            <a:ext cx="2651760" cy="1874519"/>
+          </a:xfrm>
+          <a:prstGeom prst="roundRect">
+            <a:avLst/>
+          </a:prstGeom>
+          <a:solidFill>
+            <a:srgbClr val="173055"/>
+          </a:solidFill>
+          <a:ln w="15240">
+            <a:solidFill>
+              <a:srgbClr val="61E9DF"/>
+            </a:solidFill>
+          </a:ln>
+        </p:spPr>
+        <p:style>
+          <a:lnRef idx="1">
+            <a:schemeClr val="accent1"/>
+          </a:lnRef>
+          <a:fillRef idx="3">
+            <a:schemeClr val="accent1"/>
+          </a:fillRef>
+          <a:effectRef idx="2">
+            <a:schemeClr val="accent1"/>
+          </a:effectRef>
+          <a:fontRef idx="minor">
+            <a:schemeClr val="lt1"/>
+          </a:fontRef>
+        </p:style>
+        <p:txBody>
+          <a:bodyPr rtlCol="0" anchor="ctr"/>
+          <a:lstStyle/>
+          <a:p>
+            <a:pPr algn="ctr"/>
+            <a:endParaRPr/>
+          </a:p>
+        </p:txBody>
+      </p:sp>
+      <p:sp>
+        <p:nvSpPr>
+          <p:cNvPr id="19" name="TextBox 18"/>
+          <p:cNvSpPr txBox="1"/>
+          <p:nvPr/>
+        </p:nvSpPr>
+        <p:spPr>
+          <a:xfrm>
+            <a:off x="5897880" y="2130552"/>
+            <a:ext cx="2286000" cy="292608"/>
+          </a:xfrm>
+          <a:prstGeom prst="rect">
+            <a:avLst/>
+          </a:prstGeom>
+          <a:noFill/>
+        </p:spPr>
+        <p:txBody>
+          <a:bodyPr wrap="none" lIns="0" tIns="0" rIns="0" bIns="0">
+            <a:spAutoFit/>
+          </a:bodyPr>
+          <a:lstStyle/>
+          <a:p>
+            <a:r>
+              <a:rPr sz="1320" b="1">
+                <a:solidFill>
+                  <a:srgbClr val="EEF5FF"/>
+                </a:solidFill>
+              </a:rPr>
+              <a:t>Selected architecture</a:t>
+            </a:r>
+          </a:p>
+        </p:txBody>
+      </p:sp>
+      <p:sp>
+        <p:nvSpPr>
+          <p:cNvPr id="20" name="TextBox 19"/>
+          <p:cNvSpPr txBox="1"/>
+          <p:nvPr/>
+        </p:nvSpPr>
+        <p:spPr>
+          <a:xfrm>
+            <a:off x="5897880" y="2624327"/>
+            <a:ext cx="2286000" cy="960119"/>
+          </a:xfrm>
+          <a:prstGeom prst="rect">
+            <a:avLst/>
+          </a:prstGeom>
+          <a:noFill/>
+        </p:spPr>
+        <p:txBody>
+          <a:bodyPr wrap="none" lIns="0" tIns="0" rIns="0" bIns="0">
+            <a:spAutoFit/>
+          </a:bodyPr>
+          <a:lstStyle/>
+          <a:p>
+            <a:r>
+              <a:rPr sz="1060" b="0">
+                <a:solidFill>
+                  <a:srgbClr val="AAB8CF"/>
+                </a:solidFill>
+              </a:rPr>
+              <a:t>FT-Transformer
+64-d tokens · 8 heads
+3 attention layers · dropout 0.15</a:t>
+            </a:r>
+          </a:p>
+        </p:txBody>
+      </p:sp>
+      <p:sp>
+        <p:nvSpPr>
+          <p:cNvPr id="21" name="Rounded Rectangle 20"/>
+          <p:cNvSpPr/>
+          <p:nvPr/>
+        </p:nvSpPr>
+        <p:spPr>
+          <a:xfrm>
+            <a:off x="8732520" y="1874519"/>
+            <a:ext cx="1965960" cy="1874519"/>
+          </a:xfrm>
+          <a:prstGeom prst="roundRect">
+            <a:avLst/>
+          </a:prstGeom>
+          <a:solidFill>
+            <a:srgbClr val="13243B"/>
+          </a:solidFill>
+          <a:ln>
+            <a:noFill/>
+          </a:ln>
+        </p:spPr>
+        <p:style>
+          <a:lnRef idx="1">
+            <a:schemeClr val="accent1"/>
+          </a:lnRef>
+          <a:fillRef idx="3">
+            <a:schemeClr val="accent1"/>
+          </a:fillRef>
+          <a:effectRef idx="2">
+            <a:schemeClr val="accent1"/>
+          </a:effectRef>
+          <a:fontRef idx="minor">
+            <a:schemeClr val="lt1"/>
+          </a:fontRef>
+        </p:style>
+        <p:txBody>
+          <a:bodyPr rtlCol="0" anchor="ctr"/>
+          <a:lstStyle/>
+          <a:p>
+            <a:pPr algn="ctr"/>
+            <a:endParaRPr/>
+          </a:p>
+        </p:txBody>
+      </p:sp>
+      <p:sp>
+        <p:nvSpPr>
+          <p:cNvPr id="22" name="TextBox 21"/>
+          <p:cNvSpPr txBox="1"/>
+          <p:nvPr/>
+        </p:nvSpPr>
+        <p:spPr>
+          <a:xfrm>
+            <a:off x="8915400" y="2130552"/>
+            <a:ext cx="1600200" cy="292608"/>
+          </a:xfrm>
+          <a:prstGeom prst="rect">
+            <a:avLst/>
+          </a:prstGeom>
+          <a:noFill/>
+        </p:spPr>
+        <p:txBody>
+          <a:bodyPr wrap="none" lIns="0" tIns="0" rIns="0" bIns="0">
+            <a:spAutoFit/>
+          </a:bodyPr>
+          <a:lstStyle/>
+          <a:p>
+            <a:r>
+              <a:rPr sz="1320" b="1">
+                <a:solidFill>
+                  <a:srgbClr val="EEF5FF"/>
+                </a:solidFill>
+              </a:rPr>
+              <a:t>Model output</a:t>
+            </a:r>
+          </a:p>
+        </p:txBody>
+      </p:sp>
+      <p:sp>
+        <p:nvSpPr>
+          <p:cNvPr id="23" name="TextBox 22"/>
+          <p:cNvSpPr txBox="1"/>
+          <p:nvPr/>
+        </p:nvSpPr>
+        <p:spPr>
+          <a:xfrm>
+            <a:off x="8915400" y="2624327"/>
+            <a:ext cx="1600200" cy="960119"/>
+          </a:xfrm>
+          <a:prstGeom prst="rect">
+            <a:avLst/>
+          </a:prstGeom>
+          <a:noFill/>
+        </p:spPr>
+        <p:txBody>
+          <a:bodyPr wrap="none" lIns="0" tIns="0" rIns="0" bIns="0">
+            <a:spAutoFit/>
+          </a:bodyPr>
+          <a:lstStyle/>
+          <a:p>
+            <a:r>
+              <a:rPr sz="1060" b="0">
+                <a:solidFill>
+                  <a:srgbClr val="AAB8CF"/>
+                </a:solidFill>
+              </a:rPr>
+              <a:t>NO_INJURY
+MINOR_INJURY
+SEVERE_INJURY probabilities</a:t>
+            </a:r>
+          </a:p>
+        </p:txBody>
+      </p:sp>
+      <p:sp>
+        <p:nvSpPr>
+          <p:cNvPr id="24" name="Rounded Rectangle 23"/>
+          <p:cNvSpPr/>
+          <p:nvPr/>
+        </p:nvSpPr>
+        <p:spPr>
+          <a:xfrm>
+            <a:off x="868680" y="4343400"/>
+            <a:ext cx="4343400" cy="960120"/>
+          </a:xfrm>
+          <a:prstGeom prst="roundRect">
+            <a:avLst/>
+          </a:prstGeom>
+          <a:solidFill>
+            <a:srgbClr val="102C43"/>
+          </a:solidFill>
+          <a:ln>
+            <a:noFill/>
+          </a:ln>
+        </p:spPr>
+        <p:style>
+          <a:lnRef idx="1">
+            <a:schemeClr val="accent1"/>
+          </a:lnRef>
+          <a:fillRef idx="3">
+            <a:schemeClr val="accent1"/>
+          </a:fillRef>
+          <a:effectRef idx="2">
+            <a:schemeClr val="accent1"/>
+          </a:effectRef>
+          <a:fontRef idx="minor">
+            <a:schemeClr val="lt1"/>
+          </a:fontRef>
+        </p:style>
+        <p:txBody>
+          <a:bodyPr rtlCol="0" anchor="ctr"/>
+          <a:lstStyle/>
+          <a:p>
+            <a:pPr algn="ctr"/>
+            <a:endParaRPr/>
+          </a:p>
+        </p:txBody>
+      </p:sp>
+      <p:sp>
+        <p:nvSpPr>
+          <p:cNvPr id="25" name="TextBox 24"/>
+          <p:cNvSpPr txBox="1"/>
+          <p:nvPr/>
+        </p:nvSpPr>
+        <p:spPr>
+          <a:xfrm>
+            <a:off x="1143000" y="4590288"/>
+            <a:ext cx="1417320" cy="201168"/>
+          </a:xfrm>
+          <a:prstGeom prst="rect">
+            <a:avLst/>
+          </a:prstGeom>
+          <a:noFill/>
+        </p:spPr>
+        <p:txBody>
+          <a:bodyPr wrap="none" lIns="0" tIns="0" rIns="0" bIns="0">
+            <a:spAutoFit/>
+          </a:bodyPr>
+          <a:lstStyle/>
+          <a:p>
+            <a:r>
+              <a:rPr sz="1019" b="1">
+                <a:solidFill>
+                  <a:srgbClr val="61E9DF"/>
+                </a:solidFill>
+              </a:rPr>
+              <a:t>Selection rule</a:t>
+            </a:r>
+          </a:p>
+        </p:txBody>
+      </p:sp>
+      <p:sp>
+        <p:nvSpPr>
+          <p:cNvPr id="26" name="TextBox 25"/>
+          <p:cNvSpPr txBox="1"/>
+          <p:nvPr/>
+        </p:nvSpPr>
+        <p:spPr>
+          <a:xfrm>
+            <a:off x="2125543" y="4489704"/>
+            <a:ext cx="2651761" cy="493776"/>
+          </a:xfrm>
+          <a:prstGeom prst="rect">
+            <a:avLst/>
+          </a:prstGeom>
+          <a:noFill/>
+        </p:spPr>
+        <p:txBody>
+          <a:bodyPr wrap="square" lIns="0" tIns="0" rIns="0" bIns="0">
+            <a:spAutoFit/>
+          </a:bodyPr>
+          <a:lstStyle/>
+          <a:p>
+            <a:r>
+              <a:rPr sz="1080" b="0" dirty="0">
+                <a:solidFill>
+                  <a:srgbClr val="EEF5FF"/>
+                </a:solidFill>
+              </a:rPr>
+              <a:t>Validation Macro F1 was the primary criterion; FT-Transformer was selected after comparing </a:t>
+            </a:r>
+            <a:r>
+              <a:rPr sz="1080" b="0" dirty="0" err="1">
+                <a:solidFill>
+                  <a:srgbClr val="EEF5FF"/>
+                </a:solidFill>
+              </a:rPr>
+              <a:t>CatBoost</a:t>
+            </a:r>
+            <a:r>
+              <a:rPr sz="1080" b="0" dirty="0">
+                <a:solidFill>
+                  <a:srgbClr val="EEF5FF"/>
+                </a:solidFill>
+              </a:rPr>
+              <a:t> and </a:t>
+            </a:r>
+            <a:r>
+              <a:rPr sz="1080" b="0" dirty="0" err="1">
+                <a:solidFill>
+                  <a:srgbClr val="EEF5FF"/>
+                </a:solidFill>
+              </a:rPr>
+              <a:t>XGBoost</a:t>
+            </a:r>
+            <a:r>
+              <a:rPr sz="1080" b="0" dirty="0">
+                <a:solidFill>
+                  <a:srgbClr val="EEF5FF"/>
+                </a:solidFill>
+              </a:rPr>
+              <a:t>.</a:t>
+            </a:r>
+          </a:p>
+        </p:txBody>
+      </p:sp>
+      <p:sp>
+        <p:nvSpPr>
+          <p:cNvPr id="27" name="Rounded Rectangle 26"/>
+          <p:cNvSpPr/>
+          <p:nvPr/>
+        </p:nvSpPr>
+        <p:spPr>
+          <a:xfrm>
+            <a:off x="5577840" y="4343400"/>
+            <a:ext cx="4343400" cy="960120"/>
+          </a:xfrm>
+          <a:prstGeom prst="roundRect">
+            <a:avLst/>
+          </a:prstGeom>
+          <a:solidFill>
+            <a:srgbClr val="102C43"/>
+          </a:solidFill>
+          <a:ln>
+            <a:noFill/>
+          </a:ln>
+        </p:spPr>
+        <p:style>
+          <a:lnRef idx="1">
+            <a:schemeClr val="accent1"/>
+          </a:lnRef>
+          <a:fillRef idx="3">
+            <a:schemeClr val="accent1"/>
+          </a:fillRef>
+          <a:effectRef idx="2">
+            <a:schemeClr val="accent1"/>
+          </a:effectRef>
+          <a:fontRef idx="minor">
+            <a:schemeClr val="lt1"/>
+          </a:fontRef>
+        </p:style>
+        <p:txBody>
+          <a:bodyPr rtlCol="0" anchor="ctr"/>
+          <a:lstStyle/>
+          <a:p>
+            <a:pPr algn="ctr"/>
+            <a:endParaRPr/>
+          </a:p>
+        </p:txBody>
+      </p:sp>
+      <p:sp>
+        <p:nvSpPr>
+          <p:cNvPr id="28" name="TextBox 27"/>
+          <p:cNvSpPr txBox="1"/>
+          <p:nvPr/>
+        </p:nvSpPr>
+        <p:spPr>
+          <a:xfrm>
+            <a:off x="5852160" y="4590288"/>
+            <a:ext cx="1600200" cy="201168"/>
+          </a:xfrm>
+          <a:prstGeom prst="rect">
+            <a:avLst/>
+          </a:prstGeom>
+          <a:noFill/>
+        </p:spPr>
+        <p:txBody>
+          <a:bodyPr wrap="none" lIns="0" tIns="0" rIns="0" bIns="0">
+            <a:spAutoFit/>
+          </a:bodyPr>
+          <a:lstStyle/>
+          <a:p>
+            <a:r>
+              <a:rPr sz="1019" b="1">
+                <a:solidFill>
+                  <a:srgbClr val="61E9DF"/>
+                </a:solidFill>
+              </a:rPr>
+              <a:t>Imbalance handling</a:t>
+            </a:r>
+          </a:p>
+        </p:txBody>
+      </p:sp>
+      <p:sp>
+        <p:nvSpPr>
+          <p:cNvPr id="29" name="TextBox 28"/>
+          <p:cNvSpPr txBox="1"/>
+          <p:nvPr/>
+        </p:nvSpPr>
+        <p:spPr>
+          <a:xfrm>
+            <a:off x="7132320" y="4489704"/>
+            <a:ext cx="2587752" cy="493776"/>
+          </a:xfrm>
+          <a:prstGeom prst="rect">
+            <a:avLst/>
+          </a:prstGeom>
+          <a:noFill/>
+        </p:spPr>
+        <p:txBody>
+          <a:bodyPr wrap="square" lIns="0" tIns="0" rIns="0" bIns="0">
+            <a:spAutoFit/>
+          </a:bodyPr>
+          <a:lstStyle/>
+          <a:p>
+            <a:r>
+              <a:rPr sz="1080" b="0" dirty="0">
+                <a:solidFill>
+                  <a:srgbClr val="EEF5FF"/>
+                </a:solidFill>
+              </a:rPr>
+              <a:t>Three-class target, rare-level grouping, stratified split, class-weight search, and focal loss for the neural model.</a:t>
+            </a:r>
+          </a:p>
+        </p:txBody>
+      </p:sp>
+    </p:spTree>
+  </p:cSld>
+  <p:clrMapOvr>
+    <a:masterClrMapping/>
+  </p:clrMapOvr>
+</p:sld>
+</file>
+
+<file path=ppt/slides/slide7.xml><?xml version="1.0" encoding="utf-8"?>
 <p:sld xmlns:a="http://schemas.openxmlformats.org/drawingml/2006/main" xmlns:r="http://schemas.openxmlformats.org/officeDocument/2006/relationships" xmlns:p="http://schemas.openxmlformats.org/presentationml/2006/main">
   <p:cSld name="Slide 6">
     <p:bg>
@@ -7063,6 +9306,13 @@
             <a:prstDash val="solid"/>
           </a:ln>
         </p:spPr>
+        <p:txBody>
+          <a:bodyPr/>
+          <a:lstStyle/>
+          <a:p>
+            <a:endParaRPr/>
+          </a:p>
+        </p:txBody>
       </p:sp>
       <p:sp>
         <p:nvSpPr>
@@ -7090,6 +9340,13 @@
             <a:prstDash val="solid"/>
           </a:ln>
         </p:spPr>
+        <p:txBody>
+          <a:bodyPr/>
+          <a:lstStyle/>
+          <a:p>
+            <a:endParaRPr/>
+          </a:p>
+        </p:txBody>
       </p:sp>
       <p:sp>
         <p:nvSpPr>
@@ -7234,6 +9491,13 @@
             <a:prstDash val="solid"/>
           </a:ln>
         </p:spPr>
+        <p:txBody>
+          <a:bodyPr/>
+          <a:lstStyle/>
+          <a:p>
+            <a:endParaRPr/>
+          </a:p>
+        </p:txBody>
       </p:sp>
       <p:pic>
         <p:nvPicPr>
@@ -7287,6 +9551,13 @@
             <a:prstDash val="solid"/>
           </a:ln>
         </p:spPr>
+        <p:txBody>
+          <a:bodyPr/>
+          <a:lstStyle/>
+          <a:p>
+            <a:endParaRPr/>
+          </a:p>
+        </p:txBody>
       </p:sp>
       <p:pic>
         <p:nvPicPr>
@@ -7340,6 +9611,13 @@
             <a:prstDash val="solid"/>
           </a:ln>
         </p:spPr>
+        <p:txBody>
+          <a:bodyPr/>
+          <a:lstStyle/>
+          <a:p>
+            <a:endParaRPr/>
+          </a:p>
+        </p:txBody>
       </p:sp>
       <p:pic>
         <p:nvPicPr>
@@ -7398,6 +9676,13 @@
             </a:outerShdw>
           </a:effectLst>
         </p:spPr>
+        <p:txBody>
+          <a:bodyPr/>
+          <a:lstStyle/>
+          <a:p>
+            <a:endParaRPr/>
+          </a:p>
+        </p:txBody>
       </p:sp>
       <p:sp>
         <p:nvSpPr>
@@ -7534,12 +9819,12 @@
               <a:buNone/>
             </a:pPr>
             <a:r>
-              <a:rPr lang="en-US" sz="850" b="1" dirty="0">
+              <a:rPr sz="850" b="1">
                 <a:solidFill>
                   <a:srgbClr val="61E9DF"/>
                 </a:solidFill>
               </a:rPr>
-              <a:t>06 / 10</a:t>
+              <a:t>07 / 11</a:t>
             </a:r>
             <a:endParaRPr lang="en-US" sz="850" dirty="0"/>
           </a:p>
@@ -7553,7 +9838,7 @@
 </p:sld>
 </file>
 
-<file path=ppt/slides/slide7.xml><?xml version="1.0" encoding="utf-8"?>
+<file path=ppt/slides/slide8.xml><?xml version="1.0" encoding="utf-8"?>
 <p:sld xmlns:a="http://schemas.openxmlformats.org/drawingml/2006/main" xmlns:r="http://schemas.openxmlformats.org/officeDocument/2006/relationships" xmlns:p="http://schemas.openxmlformats.org/presentationml/2006/main">
   <p:cSld name="Slide 7">
     <p:bg>
@@ -7604,6 +9889,13 @@
             <a:prstDash val="solid"/>
           </a:ln>
         </p:spPr>
+        <p:txBody>
+          <a:bodyPr/>
+          <a:lstStyle/>
+          <a:p>
+            <a:endParaRPr/>
+          </a:p>
+        </p:txBody>
       </p:sp>
       <p:sp>
         <p:nvSpPr>
@@ -7631,6 +9923,13 @@
             <a:prstDash val="solid"/>
           </a:ln>
         </p:spPr>
+        <p:txBody>
+          <a:bodyPr/>
+          <a:lstStyle/>
+          <a:p>
+            <a:endParaRPr/>
+          </a:p>
+        </p:txBody>
       </p:sp>
       <p:sp>
         <p:nvSpPr>
@@ -7770,6 +10069,13 @@
             <a:tailEnd type="triangle"/>
           </a:ln>
         </p:spPr>
+        <p:txBody>
+          <a:bodyPr/>
+          <a:lstStyle/>
+          <a:p>
+            <a:endParaRPr/>
+          </a:p>
+        </p:txBody>
       </p:sp>
       <p:sp>
         <p:nvSpPr>
@@ -7794,6 +10100,13 @@
             <a:tailEnd type="triangle"/>
           </a:ln>
         </p:spPr>
+        <p:txBody>
+          <a:bodyPr/>
+          <a:lstStyle/>
+          <a:p>
+            <a:endParaRPr/>
+          </a:p>
+        </p:txBody>
       </p:sp>
       <p:sp>
         <p:nvSpPr>
@@ -7818,6 +10131,13 @@
             <a:tailEnd type="triangle"/>
           </a:ln>
         </p:spPr>
+        <p:txBody>
+          <a:bodyPr/>
+          <a:lstStyle/>
+          <a:p>
+            <a:endParaRPr/>
+          </a:p>
+        </p:txBody>
       </p:sp>
       <p:sp>
         <p:nvSpPr>
@@ -7852,6 +10172,13 @@
             </a:outerShdw>
           </a:effectLst>
         </p:spPr>
+        <p:txBody>
+          <a:bodyPr/>
+          <a:lstStyle/>
+          <a:p>
+            <a:endParaRPr/>
+          </a:p>
+        </p:txBody>
       </p:sp>
       <p:sp>
         <p:nvSpPr>
@@ -7962,6 +10289,13 @@
             </a:outerShdw>
           </a:effectLst>
         </p:spPr>
+        <p:txBody>
+          <a:bodyPr/>
+          <a:lstStyle/>
+          <a:p>
+            <a:endParaRPr/>
+          </a:p>
+        </p:txBody>
       </p:sp>
       <p:sp>
         <p:nvSpPr>
@@ -8072,6 +10406,13 @@
             </a:outerShdw>
           </a:effectLst>
         </p:spPr>
+        <p:txBody>
+          <a:bodyPr/>
+          <a:lstStyle/>
+          <a:p>
+            <a:endParaRPr/>
+          </a:p>
+        </p:txBody>
       </p:sp>
       <p:sp>
         <p:nvSpPr>
@@ -8182,6 +10523,13 @@
             </a:outerShdw>
           </a:effectLst>
         </p:spPr>
+        <p:txBody>
+          <a:bodyPr/>
+          <a:lstStyle/>
+          <a:p>
+            <a:endParaRPr/>
+          </a:p>
+        </p:txBody>
       </p:sp>
       <p:sp>
         <p:nvSpPr>
@@ -8292,6 +10640,13 @@
             </a:outerShdw>
           </a:effectLst>
         </p:spPr>
+        <p:txBody>
+          <a:bodyPr/>
+          <a:lstStyle/>
+          <a:p>
+            <a:endParaRPr/>
+          </a:p>
+        </p:txBody>
       </p:sp>
       <p:sp>
         <p:nvSpPr>
@@ -8337,8 +10692,8 @@
         </p:nvSpPr>
         <p:spPr>
           <a:xfrm>
-            <a:off x="2971800" y="4873752"/>
-            <a:ext cx="2240280" cy="329184"/>
+            <a:off x="2269067" y="4873752"/>
+            <a:ext cx="2943013" cy="329184"/>
           </a:xfrm>
           <a:prstGeom prst="rect">
             <a:avLst/>
@@ -8348,7 +10703,7 @@
         </p:spPr>
         <p:txBody>
           <a:bodyPr wrap="square" lIns="0" tIns="0" rIns="0" bIns="0" rtlCol="0" anchor="ctr">
-            <a:normAutofit fontScale="70000" lnSpcReduction="20000"/>
+            <a:normAutofit fontScale="92500" lnSpcReduction="10000"/>
           </a:bodyPr>
           <a:lstStyle/>
           <a:p>
@@ -8400,6 +10755,13 @@
             </a:outerShdw>
           </a:effectLst>
         </p:spPr>
+        <p:txBody>
+          <a:bodyPr/>
+          <a:lstStyle/>
+          <a:p>
+            <a:endParaRPr/>
+          </a:p>
+        </p:txBody>
       </p:sp>
       <p:sp>
         <p:nvSpPr>
@@ -8445,8 +10807,8 @@
         </p:nvSpPr>
         <p:spPr>
           <a:xfrm>
-            <a:off x="7818120" y="4892040"/>
-            <a:ext cx="2514600" cy="292608"/>
+            <a:off x="7179733" y="4892040"/>
+            <a:ext cx="3152987" cy="292608"/>
           </a:xfrm>
           <a:prstGeom prst="rect">
             <a:avLst/>
@@ -8536,12 +10898,12 @@
               <a:buNone/>
             </a:pPr>
             <a:r>
-              <a:rPr lang="en-US" sz="850" b="1" dirty="0">
+              <a:rPr sz="850" b="1">
                 <a:solidFill>
                   <a:srgbClr val="61E9DF"/>
                 </a:solidFill>
               </a:rPr>
-              <a:t>07 / 10</a:t>
+              <a:t>08 / 11</a:t>
             </a:r>
             <a:endParaRPr lang="en-US" sz="850" dirty="0"/>
           </a:p>
@@ -8555,7 +10917,7 @@
 </p:sld>
 </file>
 
-<file path=ppt/slides/slide8.xml><?xml version="1.0" encoding="utf-8"?>
+<file path=ppt/slides/slide9.xml><?xml version="1.0" encoding="utf-8"?>
 <p:sld xmlns:a="http://schemas.openxmlformats.org/drawingml/2006/main" xmlns:r="http://schemas.openxmlformats.org/officeDocument/2006/relationships" xmlns:p="http://schemas.openxmlformats.org/presentationml/2006/main">
   <p:cSld name="Slide 8">
     <p:bg>
@@ -8606,6 +10968,13 @@
             <a:prstDash val="solid"/>
           </a:ln>
         </p:spPr>
+        <p:txBody>
+          <a:bodyPr/>
+          <a:lstStyle/>
+          <a:p>
+            <a:endParaRPr/>
+          </a:p>
+        </p:txBody>
       </p:sp>
       <p:sp>
         <p:nvSpPr>
@@ -8633,6 +11002,13 @@
             <a:prstDash val="solid"/>
           </a:ln>
         </p:spPr>
+        <p:txBody>
+          <a:bodyPr/>
+          <a:lstStyle/>
+          <a:p>
+            <a:endParaRPr/>
+          </a:p>
+        </p:txBody>
       </p:sp>
       <p:sp>
         <p:nvSpPr>
@@ -8777,6 +11153,13 @@
             <a:prstDash val="solid"/>
           </a:ln>
         </p:spPr>
+        <p:txBody>
+          <a:bodyPr/>
+          <a:lstStyle/>
+          <a:p>
+            <a:endParaRPr/>
+          </a:p>
+        </p:txBody>
       </p:sp>
       <p:pic>
         <p:nvPicPr>
@@ -8835,6 +11218,13 @@
             </a:outerShdw>
           </a:effectLst>
         </p:spPr>
+        <p:txBody>
+          <a:bodyPr/>
+          <a:lstStyle/>
+          <a:p>
+            <a:endParaRPr/>
+          </a:p>
+        </p:txBody>
       </p:sp>
       <p:sp>
         <p:nvSpPr>
@@ -9341,813 +11731,12 @@
               <a:buNone/>
             </a:pPr>
             <a:r>
-              <a:rPr lang="en-US" sz="850" b="1" dirty="0">
+              <a:rPr sz="850" b="1">
                 <a:solidFill>
                   <a:srgbClr val="61E9DF"/>
                 </a:solidFill>
               </a:rPr>
-              <a:t>08 / 10</a:t>
-            </a:r>
-            <a:endParaRPr lang="en-US" sz="850" dirty="0"/>
-          </a:p>
-        </p:txBody>
-      </p:sp>
-    </p:spTree>
-  </p:cSld>
-  <p:clrMapOvr>
-    <a:masterClrMapping/>
-  </p:clrMapOvr>
-</p:sld>
-</file>
-
-<file path=ppt/slides/slide9.xml><?xml version="1.0" encoding="utf-8"?>
-<p:sld xmlns:a="http://schemas.openxmlformats.org/drawingml/2006/main" xmlns:r="http://schemas.openxmlformats.org/officeDocument/2006/relationships" xmlns:p="http://schemas.openxmlformats.org/presentationml/2006/main">
-  <p:cSld name="Slide 9">
-    <p:bg>
-      <p:bgPr>
-        <a:solidFill>
-          <a:srgbClr val="0B1628"/>
-        </a:solidFill>
-        <a:effectLst/>
-      </p:bgPr>
-    </p:bg>
-    <p:spTree>
-      <p:nvGrpSpPr>
-        <p:cNvPr id="1" name=""/>
-        <p:cNvGrpSpPr/>
-        <p:nvPr/>
-      </p:nvGrpSpPr>
-      <p:grpSpPr>
-        <a:xfrm>
-          <a:off x="0" y="0"/>
-          <a:ext cx="0" cy="0"/>
-          <a:chOff x="0" y="0"/>
-          <a:chExt cx="0" cy="0"/>
-        </a:xfrm>
-      </p:grpSpPr>
-      <p:sp>
-        <p:nvSpPr>
-          <p:cNvPr id="2" name="Shape 0"/>
-          <p:cNvSpPr/>
-          <p:nvPr/>
-        </p:nvSpPr>
-        <p:spPr>
-          <a:xfrm>
-            <a:off x="0" y="0"/>
-            <a:ext cx="12191695" cy="6858000"/>
-          </a:xfrm>
-          <a:prstGeom prst="rect">
-            <a:avLst/>
-          </a:prstGeom>
-          <a:solidFill>
-            <a:srgbClr val="0B1628"/>
-          </a:solidFill>
-          <a:ln w="12700">
-            <a:solidFill>
-              <a:srgbClr val="0B1628">
-                <a:alpha val="0"/>
-              </a:srgbClr>
-            </a:solidFill>
-            <a:prstDash val="solid"/>
-          </a:ln>
-        </p:spPr>
-      </p:sp>
-      <p:sp>
-        <p:nvSpPr>
-          <p:cNvPr id="3" name="Shape 1"/>
-          <p:cNvSpPr/>
-          <p:nvPr/>
-        </p:nvSpPr>
-        <p:spPr>
-          <a:xfrm>
-            <a:off x="0" y="0"/>
-            <a:ext cx="118872" cy="6858000"/>
-          </a:xfrm>
-          <a:prstGeom prst="rect">
-            <a:avLst/>
-          </a:prstGeom>
-          <a:solidFill>
-            <a:srgbClr val="61E9DF"/>
-          </a:solidFill>
-          <a:ln w="12700">
-            <a:solidFill>
-              <a:srgbClr val="61E9DF">
-                <a:alpha val="0"/>
-              </a:srgbClr>
-            </a:solidFill>
-            <a:prstDash val="solid"/>
-          </a:ln>
-        </p:spPr>
-      </p:sp>
-      <p:sp>
-        <p:nvSpPr>
-          <p:cNvPr id="4" name="Text 2"/>
-          <p:cNvSpPr/>
-          <p:nvPr/>
-        </p:nvSpPr>
-        <p:spPr>
-          <a:xfrm>
-            <a:off x="685800" y="393192"/>
-            <a:ext cx="4846320" cy="201168"/>
-          </a:xfrm>
-          <a:prstGeom prst="rect">
-            <a:avLst/>
-          </a:prstGeom>
-          <a:noFill/>
-          <a:ln/>
-        </p:spPr>
-        <p:txBody>
-          <a:bodyPr wrap="square" lIns="0" tIns="0" rIns="0" bIns="0" rtlCol="0" anchor="ctr"/>
-          <a:lstStyle/>
-          <a:p>
-            <a:pPr marL="0" indent="0">
-              <a:buNone/>
-            </a:pPr>
-            <a:r>
-              <a:rPr lang="en-US" sz="840" b="1" dirty="0">
-                <a:solidFill>
-                  <a:srgbClr val="61E9DF"/>
-                </a:solidFill>
-              </a:rPr>
-              <a:t>RELIABILITY AND LIMITATIONS</a:t>
-            </a:r>
-            <a:endParaRPr lang="en-US" sz="840" dirty="0"/>
-          </a:p>
-        </p:txBody>
-      </p:sp>
-      <p:sp>
-        <p:nvSpPr>
-          <p:cNvPr id="5" name="Text 3"/>
-          <p:cNvSpPr/>
-          <p:nvPr/>
-        </p:nvSpPr>
-        <p:spPr>
-          <a:xfrm>
-            <a:off x="685800" y="704088"/>
-            <a:ext cx="9601200" cy="502920"/>
-          </a:xfrm>
-          <a:prstGeom prst="rect">
-            <a:avLst/>
-          </a:prstGeom>
-          <a:noFill/>
-          <a:ln/>
-        </p:spPr>
-        <p:txBody>
-          <a:bodyPr wrap="square" lIns="0" tIns="0" rIns="0" bIns="0" rtlCol="0" anchor="ctr">
-            <a:normAutofit/>
-          </a:bodyPr>
-          <a:lstStyle/>
-          <a:p>
-            <a:pPr marL="0" indent="0">
-              <a:buNone/>
-            </a:pPr>
-            <a:r>
-              <a:rPr lang="en-US" sz="2700" b="1" dirty="0">
-                <a:solidFill>
-                  <a:srgbClr val="EEF5FF"/>
-                </a:solidFill>
-                <a:latin typeface="Aptos Display" pitchFamily="34" charset="0"/>
-                <a:ea typeface="Aptos Display" pitchFamily="34" charset="-122"/>
-                <a:cs typeface="Aptos Display" pitchFamily="34" charset="-120"/>
-              </a:rPr>
-              <a:t>Robust demo behavior, cautious model claims</a:t>
-            </a:r>
-            <a:endParaRPr lang="en-US" sz="2700" dirty="0"/>
-          </a:p>
-        </p:txBody>
-      </p:sp>
-      <p:sp>
-        <p:nvSpPr>
-          <p:cNvPr id="6" name="Text 4"/>
-          <p:cNvSpPr/>
-          <p:nvPr/>
-        </p:nvSpPr>
-        <p:spPr>
-          <a:xfrm>
-            <a:off x="713232" y="1307592"/>
-            <a:ext cx="9875520" cy="310896"/>
-          </a:xfrm>
-          <a:prstGeom prst="rect">
-            <a:avLst/>
-          </a:prstGeom>
-          <a:noFill/>
-          <a:ln/>
-        </p:spPr>
-        <p:txBody>
-          <a:bodyPr wrap="square" lIns="0" tIns="0" rIns="0" bIns="0" rtlCol="0" anchor="ctr">
-            <a:normAutofit/>
-          </a:bodyPr>
-          <a:lstStyle/>
-          <a:p>
-            <a:pPr marL="0" indent="0">
-              <a:buNone/>
-            </a:pPr>
-            <a:r>
-              <a:rPr lang="en-US" sz="1260" dirty="0">
-                <a:solidFill>
-                  <a:srgbClr val="AAB8CF"/>
-                </a:solidFill>
-              </a:rPr>
-              <a:t>Fallback behavior is explicit, and the model is not framed as an emergency decision system.</a:t>
-            </a:r>
-            <a:endParaRPr lang="en-US" sz="1260" dirty="0"/>
-          </a:p>
-        </p:txBody>
-      </p:sp>
-      <p:sp>
-        <p:nvSpPr>
-          <p:cNvPr id="7" name="Shape 5"/>
-          <p:cNvSpPr/>
-          <p:nvPr/>
-        </p:nvSpPr>
-        <p:spPr>
-          <a:xfrm>
-            <a:off x="658368" y="1783080"/>
-            <a:ext cx="5897880" cy="3246120"/>
-          </a:xfrm>
-          <a:prstGeom prst="roundRect">
-            <a:avLst>
-              <a:gd name="adj" fmla="val 1690"/>
-            </a:avLst>
-          </a:prstGeom>
-          <a:solidFill>
-            <a:srgbClr val="FFFFFF"/>
-          </a:solidFill>
-          <a:ln w="6350">
-            <a:solidFill>
-              <a:srgbClr val="C8D1DE">
-                <a:alpha val="65000"/>
-              </a:srgbClr>
-            </a:solidFill>
-            <a:prstDash val="solid"/>
-          </a:ln>
-        </p:spPr>
-      </p:sp>
-      <p:pic>
-        <p:nvPicPr>
-          <p:cNvPr id="8" name="Image 0" descr="/mnt/data/web-EDA.png"/>
-          <p:cNvPicPr>
-            <a:picLocks noChangeAspect="1"/>
-          </p:cNvPicPr>
-          <p:nvPr/>
-        </p:nvPicPr>
-        <p:blipFill>
-          <a:blip r:embed="rId3"/>
-          <a:stretch>
-            <a:fillRect/>
-          </a:stretch>
-        </p:blipFill>
-        <p:spPr>
-          <a:xfrm>
-            <a:off x="1389930" y="1856232"/>
-            <a:ext cx="4434756" cy="3099816"/>
-          </a:xfrm>
-          <a:prstGeom prst="rect">
-            <a:avLst/>
-          </a:prstGeom>
-        </p:spPr>
-      </p:pic>
-      <p:sp>
-        <p:nvSpPr>
-          <p:cNvPr id="9" name="Shape 6"/>
-          <p:cNvSpPr/>
-          <p:nvPr/>
-        </p:nvSpPr>
-        <p:spPr>
-          <a:xfrm>
-            <a:off x="6903720" y="1783080"/>
-            <a:ext cx="4434840" cy="3246120"/>
-          </a:xfrm>
-          <a:prstGeom prst="roundRect">
-            <a:avLst>
-              <a:gd name="adj" fmla="val 2254"/>
-            </a:avLst>
-          </a:prstGeom>
-          <a:solidFill>
-            <a:srgbClr val="12233A"/>
-          </a:solidFill>
-          <a:ln w="9525">
-            <a:solidFill>
-              <a:srgbClr val="2A4467"/>
-            </a:solidFill>
-            <a:prstDash val="solid"/>
-          </a:ln>
-          <a:effectLst>
-            <a:outerShdw blurRad="12700" dist="11430" dir="2700000" algn="bl" rotWithShape="0">
-              <a:srgbClr val="000000">
-                <a:alpha val="14000"/>
-              </a:srgbClr>
-            </a:outerShdw>
-          </a:effectLst>
-        </p:spPr>
-      </p:sp>
-      <p:sp>
-        <p:nvSpPr>
-          <p:cNvPr id="10" name="Text 7"/>
-          <p:cNvSpPr/>
-          <p:nvPr/>
-        </p:nvSpPr>
-        <p:spPr>
-          <a:xfrm>
-            <a:off x="7223760" y="2121408"/>
-            <a:ext cx="1645920" cy="219456"/>
-          </a:xfrm>
-          <a:prstGeom prst="rect">
-            <a:avLst/>
-          </a:prstGeom>
-          <a:noFill/>
-          <a:ln/>
-        </p:spPr>
-        <p:txBody>
-          <a:bodyPr wrap="square" lIns="0" tIns="0" rIns="0" bIns="0" rtlCol="0" anchor="ctr"/>
-          <a:lstStyle/>
-          <a:p>
-            <a:pPr marL="0" indent="0">
-              <a:buNone/>
-            </a:pPr>
-            <a:r>
-              <a:rPr lang="en-US" sz="1400" b="1" dirty="0">
-                <a:solidFill>
-                  <a:srgbClr val="FFB15E"/>
-                </a:solidFill>
-              </a:rPr>
-              <a:t>Known limits</a:t>
-            </a:r>
-            <a:endParaRPr lang="en-US" sz="1400" dirty="0"/>
-          </a:p>
-        </p:txBody>
-      </p:sp>
-      <p:sp>
-        <p:nvSpPr>
-          <p:cNvPr id="11" name="Text 8"/>
-          <p:cNvSpPr/>
-          <p:nvPr/>
-        </p:nvSpPr>
-        <p:spPr>
-          <a:xfrm>
-            <a:off x="7242048" y="2615184"/>
-            <a:ext cx="164592" cy="164592"/>
-          </a:xfrm>
-          <a:prstGeom prst="rect">
-            <a:avLst/>
-          </a:prstGeom>
-          <a:noFill/>
-          <a:ln/>
-        </p:spPr>
-        <p:txBody>
-          <a:bodyPr wrap="square" lIns="0" tIns="0" rIns="0" bIns="0" rtlCol="0" anchor="ctr"/>
-          <a:lstStyle/>
-          <a:p>
-            <a:pPr marL="0" indent="0">
-              <a:buNone/>
-            </a:pPr>
-            <a:r>
-              <a:rPr lang="en-US" sz="1380" b="1" dirty="0">
-                <a:solidFill>
-                  <a:srgbClr val="61E9DF"/>
-                </a:solidFill>
-              </a:rPr>
-              <a:t>•</a:t>
-            </a:r>
-            <a:endParaRPr lang="en-US" sz="1380" dirty="0"/>
-          </a:p>
-        </p:txBody>
-      </p:sp>
-      <p:sp>
-        <p:nvSpPr>
-          <p:cNvPr id="12" name="Text 9"/>
-          <p:cNvSpPr/>
-          <p:nvPr/>
-        </p:nvSpPr>
-        <p:spPr>
-          <a:xfrm>
-            <a:off x="7488936" y="2596896"/>
-            <a:ext cx="3200400" cy="237744"/>
-          </a:xfrm>
-          <a:prstGeom prst="rect">
-            <a:avLst/>
-          </a:prstGeom>
-          <a:noFill/>
-          <a:ln/>
-        </p:spPr>
-        <p:txBody>
-          <a:bodyPr wrap="square" lIns="0" tIns="0" rIns="0" bIns="0" rtlCol="0" anchor="ctr">
-            <a:normAutofit fontScale="85000" lnSpcReduction="10000"/>
-          </a:bodyPr>
-          <a:lstStyle/>
-          <a:p>
-            <a:pPr marL="0" indent="0">
-              <a:buNone/>
-            </a:pPr>
-            <a:r>
-              <a:rPr lang="en-US" sz="1150" dirty="0">
-                <a:solidFill>
-                  <a:srgbClr val="D9E5F6"/>
-                </a:solidFill>
-              </a:rPr>
-              <a:t>local prototype: no auth, database, or production logging</a:t>
-            </a:r>
-            <a:endParaRPr lang="en-US" sz="1150" dirty="0"/>
-          </a:p>
-        </p:txBody>
-      </p:sp>
-      <p:sp>
-        <p:nvSpPr>
-          <p:cNvPr id="13" name="Text 10"/>
-          <p:cNvSpPr/>
-          <p:nvPr/>
-        </p:nvSpPr>
-        <p:spPr>
-          <a:xfrm>
-            <a:off x="7242048" y="3054096"/>
-            <a:ext cx="164592" cy="164592"/>
-          </a:xfrm>
-          <a:prstGeom prst="rect">
-            <a:avLst/>
-          </a:prstGeom>
-          <a:noFill/>
-          <a:ln/>
-        </p:spPr>
-        <p:txBody>
-          <a:bodyPr wrap="square" lIns="0" tIns="0" rIns="0" bIns="0" rtlCol="0" anchor="ctr"/>
-          <a:lstStyle/>
-          <a:p>
-            <a:pPr marL="0" indent="0">
-              <a:buNone/>
-            </a:pPr>
-            <a:r>
-              <a:rPr lang="en-US" sz="1380" b="1" dirty="0">
-                <a:solidFill>
-                  <a:srgbClr val="61E9DF"/>
-                </a:solidFill>
-              </a:rPr>
-              <a:t>•</a:t>
-            </a:r>
-            <a:endParaRPr lang="en-US" sz="1380" dirty="0"/>
-          </a:p>
-        </p:txBody>
-      </p:sp>
-      <p:sp>
-        <p:nvSpPr>
-          <p:cNvPr id="14" name="Text 11"/>
-          <p:cNvSpPr/>
-          <p:nvPr/>
-        </p:nvSpPr>
-        <p:spPr>
-          <a:xfrm>
-            <a:off x="7488936" y="3035808"/>
-            <a:ext cx="3200400" cy="237744"/>
-          </a:xfrm>
-          <a:prstGeom prst="rect">
-            <a:avLst/>
-          </a:prstGeom>
-          <a:noFill/>
-          <a:ln/>
-        </p:spPr>
-        <p:txBody>
-          <a:bodyPr wrap="square" lIns="0" tIns="0" rIns="0" bIns="0" rtlCol="0" anchor="ctr">
-            <a:normAutofit/>
-          </a:bodyPr>
-          <a:lstStyle/>
-          <a:p>
-            <a:pPr marL="0" indent="0">
-              <a:buNone/>
-            </a:pPr>
-            <a:r>
-              <a:rPr lang="en-US" sz="1150" dirty="0">
-                <a:solidFill>
-                  <a:srgbClr val="D9E5F6"/>
-                </a:solidFill>
-              </a:rPr>
-              <a:t>severe cases are rare and difficult to detect</a:t>
-            </a:r>
-            <a:endParaRPr lang="en-US" sz="1150" dirty="0"/>
-          </a:p>
-        </p:txBody>
-      </p:sp>
-      <p:sp>
-        <p:nvSpPr>
-          <p:cNvPr id="15" name="Text 12"/>
-          <p:cNvSpPr/>
-          <p:nvPr/>
-        </p:nvSpPr>
-        <p:spPr>
-          <a:xfrm>
-            <a:off x="7242048" y="3493008"/>
-            <a:ext cx="164592" cy="164592"/>
-          </a:xfrm>
-          <a:prstGeom prst="rect">
-            <a:avLst/>
-          </a:prstGeom>
-          <a:noFill/>
-          <a:ln/>
-        </p:spPr>
-        <p:txBody>
-          <a:bodyPr wrap="square" lIns="0" tIns="0" rIns="0" bIns="0" rtlCol="0" anchor="ctr"/>
-          <a:lstStyle/>
-          <a:p>
-            <a:pPr marL="0" indent="0">
-              <a:buNone/>
-            </a:pPr>
-            <a:r>
-              <a:rPr lang="en-US" sz="1380" b="1" dirty="0">
-                <a:solidFill>
-                  <a:srgbClr val="61E9DF"/>
-                </a:solidFill>
-              </a:rPr>
-              <a:t>•</a:t>
-            </a:r>
-            <a:endParaRPr lang="en-US" sz="1380" dirty="0"/>
-          </a:p>
-        </p:txBody>
-      </p:sp>
-      <p:sp>
-        <p:nvSpPr>
-          <p:cNvPr id="16" name="Text 13"/>
-          <p:cNvSpPr/>
-          <p:nvPr/>
-        </p:nvSpPr>
-        <p:spPr>
-          <a:xfrm>
-            <a:off x="7488936" y="3474720"/>
-            <a:ext cx="3200400" cy="237744"/>
-          </a:xfrm>
-          <a:prstGeom prst="rect">
-            <a:avLst/>
-          </a:prstGeom>
-          <a:noFill/>
-          <a:ln/>
-        </p:spPr>
-        <p:txBody>
-          <a:bodyPr wrap="square" lIns="0" tIns="0" rIns="0" bIns="0" rtlCol="0" anchor="ctr">
-            <a:normAutofit fontScale="77500" lnSpcReduction="20000"/>
-          </a:bodyPr>
-          <a:lstStyle/>
-          <a:p>
-            <a:pPr marL="0" indent="0">
-              <a:buNone/>
-            </a:pPr>
-            <a:r>
-              <a:rPr lang="en-US" sz="1150" dirty="0">
-                <a:solidFill>
-                  <a:srgbClr val="D9E5F6"/>
-                </a:solidFill>
-              </a:rPr>
-              <a:t>weather defaults depend on browser permission and API access</a:t>
-            </a:r>
-            <a:endParaRPr lang="en-US" sz="1150" dirty="0"/>
-          </a:p>
-        </p:txBody>
-      </p:sp>
-      <p:sp>
-        <p:nvSpPr>
-          <p:cNvPr id="17" name="Text 14"/>
-          <p:cNvSpPr/>
-          <p:nvPr/>
-        </p:nvSpPr>
-        <p:spPr>
-          <a:xfrm>
-            <a:off x="7242048" y="3931920"/>
-            <a:ext cx="164592" cy="164592"/>
-          </a:xfrm>
-          <a:prstGeom prst="rect">
-            <a:avLst/>
-          </a:prstGeom>
-          <a:noFill/>
-          <a:ln/>
-        </p:spPr>
-        <p:txBody>
-          <a:bodyPr wrap="square" lIns="0" tIns="0" rIns="0" bIns="0" rtlCol="0" anchor="ctr"/>
-          <a:lstStyle/>
-          <a:p>
-            <a:pPr marL="0" indent="0">
-              <a:buNone/>
-            </a:pPr>
-            <a:r>
-              <a:rPr lang="en-US" sz="1380" b="1" dirty="0">
-                <a:solidFill>
-                  <a:srgbClr val="61E9DF"/>
-                </a:solidFill>
-              </a:rPr>
-              <a:t>•</a:t>
-            </a:r>
-            <a:endParaRPr lang="en-US" sz="1380" dirty="0"/>
-          </a:p>
-        </p:txBody>
-      </p:sp>
-      <p:sp>
-        <p:nvSpPr>
-          <p:cNvPr id="18" name="Text 15"/>
-          <p:cNvSpPr/>
-          <p:nvPr/>
-        </p:nvSpPr>
-        <p:spPr>
-          <a:xfrm>
-            <a:off x="7488936" y="3913632"/>
-            <a:ext cx="3200400" cy="237744"/>
-          </a:xfrm>
-          <a:prstGeom prst="rect">
-            <a:avLst/>
-          </a:prstGeom>
-          <a:noFill/>
-          <a:ln/>
-        </p:spPr>
-        <p:txBody>
-          <a:bodyPr wrap="square" lIns="0" tIns="0" rIns="0" bIns="0" rtlCol="0" anchor="ctr">
-            <a:normAutofit/>
-          </a:bodyPr>
-          <a:lstStyle/>
-          <a:p>
-            <a:pPr marL="0" indent="0">
-              <a:buNone/>
-            </a:pPr>
-            <a:r>
-              <a:rPr lang="en-US" sz="1150" dirty="0">
-                <a:solidFill>
-                  <a:srgbClr val="D9E5F6"/>
-                </a:solidFill>
-              </a:rPr>
-              <a:t>new locations require retraining and validation</a:t>
-            </a:r>
-            <a:endParaRPr lang="en-US" sz="1150" dirty="0"/>
-          </a:p>
-        </p:txBody>
-      </p:sp>
-      <p:sp>
-        <p:nvSpPr>
-          <p:cNvPr id="19" name="Shape 16"/>
-          <p:cNvSpPr/>
-          <p:nvPr/>
-        </p:nvSpPr>
-        <p:spPr>
-          <a:xfrm>
-            <a:off x="868680" y="5330952"/>
-            <a:ext cx="10012680" cy="749808"/>
-          </a:xfrm>
-          <a:prstGeom prst="roundRect">
-            <a:avLst>
-              <a:gd name="adj" fmla="val 9756"/>
-            </a:avLst>
-          </a:prstGeom>
-          <a:solidFill>
-            <a:srgbClr val="102C43"/>
-          </a:solidFill>
-          <a:ln w="9525">
-            <a:solidFill>
-              <a:srgbClr val="2A4467"/>
-            </a:solidFill>
-            <a:prstDash val="solid"/>
-          </a:ln>
-          <a:effectLst>
-            <a:outerShdw blurRad="12700" dist="11430" dir="2700000" algn="bl" rotWithShape="0">
-              <a:srgbClr val="000000">
-                <a:alpha val="14000"/>
-              </a:srgbClr>
-            </a:outerShdw>
-          </a:effectLst>
-        </p:spPr>
-      </p:sp>
-      <p:sp>
-        <p:nvSpPr>
-          <p:cNvPr id="20" name="Text 17"/>
-          <p:cNvSpPr/>
-          <p:nvPr/>
-        </p:nvSpPr>
-        <p:spPr>
-          <a:xfrm>
-            <a:off x="1170432" y="5559552"/>
-            <a:ext cx="1508760" cy="182880"/>
-          </a:xfrm>
-          <a:prstGeom prst="rect">
-            <a:avLst/>
-          </a:prstGeom>
-          <a:noFill/>
-          <a:ln/>
-        </p:spPr>
-        <p:txBody>
-          <a:bodyPr wrap="square" lIns="0" tIns="0" rIns="0" bIns="0" rtlCol="0" anchor="ctr"/>
-          <a:lstStyle/>
-          <a:p>
-            <a:pPr marL="0" indent="0">
-              <a:buNone/>
-            </a:pPr>
-            <a:r>
-              <a:rPr lang="en-US" sz="980" b="1" dirty="0">
-                <a:solidFill>
-                  <a:srgbClr val="61E9DF"/>
-                </a:solidFill>
-              </a:rPr>
-              <a:t>Robustness rule</a:t>
-            </a:r>
-            <a:endParaRPr lang="en-US" sz="980" dirty="0"/>
-          </a:p>
-        </p:txBody>
-      </p:sp>
-      <p:sp>
-        <p:nvSpPr>
-          <p:cNvPr id="21" name="Text 18"/>
-          <p:cNvSpPr/>
-          <p:nvPr/>
-        </p:nvSpPr>
-        <p:spPr>
-          <a:xfrm>
-            <a:off x="2788920" y="5504688"/>
-            <a:ext cx="7406640" cy="256032"/>
-          </a:xfrm>
-          <a:prstGeom prst="rect">
-            <a:avLst/>
-          </a:prstGeom>
-          <a:noFill/>
-          <a:ln/>
-        </p:spPr>
-        <p:txBody>
-          <a:bodyPr wrap="square" lIns="0" tIns="0" rIns="0" bIns="0" rtlCol="0" anchor="ctr">
-            <a:normAutofit fontScale="85000" lnSpcReduction="20000"/>
-          </a:bodyPr>
-          <a:lstStyle/>
-          <a:p>
-            <a:pPr marL="0" indent="0">
-              <a:buNone/>
-            </a:pPr>
-            <a:r>
-              <a:rPr lang="en-US" sz="1230" dirty="0">
-                <a:solidFill>
-                  <a:srgbClr val="D9E5F6"/>
-                </a:solidFill>
-              </a:rPr>
-              <a:t>If model files or libraries are unavailable, the interface clearly labels demo fallback mode rather than presenting heuristic output as real model evidence.</a:t>
-            </a:r>
-            <a:endParaRPr lang="en-US" sz="1230" dirty="0"/>
-          </a:p>
-        </p:txBody>
-      </p:sp>
-      <p:sp>
-        <p:nvSpPr>
-          <p:cNvPr id="22" name="Text 19"/>
-          <p:cNvSpPr/>
-          <p:nvPr/>
-        </p:nvSpPr>
-        <p:spPr>
-          <a:xfrm>
-            <a:off x="502920" y="6547104"/>
-            <a:ext cx="6949440" cy="164592"/>
-          </a:xfrm>
-          <a:prstGeom prst="rect">
-            <a:avLst/>
-          </a:prstGeom>
-          <a:noFill/>
-          <a:ln/>
-        </p:spPr>
-        <p:txBody>
-          <a:bodyPr wrap="square" lIns="0" tIns="0" rIns="0" bIns="0" rtlCol="0" anchor="ctr"/>
-          <a:lstStyle/>
-          <a:p>
-            <a:pPr marL="0" indent="0">
-              <a:buNone/>
-            </a:pPr>
-            <a:r>
-              <a:rPr lang="en-US" sz="780" dirty="0">
-                <a:solidFill>
-                  <a:srgbClr val="778AA6"/>
-                </a:solidFill>
-              </a:rPr>
-              <a:t>INFO 442 · Traffic Accident Severity Prediction</a:t>
-            </a:r>
-            <a:endParaRPr lang="en-US" sz="780" dirty="0"/>
-          </a:p>
-        </p:txBody>
-      </p:sp>
-      <p:sp>
-        <p:nvSpPr>
-          <p:cNvPr id="23" name="Text 20"/>
-          <p:cNvSpPr/>
-          <p:nvPr/>
-        </p:nvSpPr>
-        <p:spPr>
-          <a:xfrm>
-            <a:off x="10881360" y="6473952"/>
-            <a:ext cx="777240" cy="201168"/>
-          </a:xfrm>
-          <a:prstGeom prst="rect">
-            <a:avLst/>
-          </a:prstGeom>
-          <a:noFill/>
-          <a:ln/>
-        </p:spPr>
-        <p:txBody>
-          <a:bodyPr wrap="square" lIns="0" tIns="0" rIns="0" bIns="0" rtlCol="0" anchor="ctr"/>
-          <a:lstStyle/>
-          <a:p>
-            <a:pPr marL="0" indent="0" algn="r">
-              <a:buNone/>
-            </a:pPr>
-            <a:r>
-              <a:rPr lang="en-US" sz="850" b="1" dirty="0">
-                <a:solidFill>
-                  <a:srgbClr val="61E9DF"/>
-                </a:solidFill>
-              </a:rPr>
-              <a:t>09 / 10</a:t>
+              <a:t>09 / 11</a:t>
             </a:r>
             <a:endParaRPr lang="en-US" sz="850" dirty="0"/>
           </a:p>
